--- a/PhishTrace_Hacktoberfest_Team_Dark.pptx
+++ b/PhishTrace_Hacktoberfest_Team_Dark.pptx
@@ -3102,7 +3102,7 @@
         <p:spPr>
           <a:xfrm>
             <a:off x="731520" y="365760"/>
-            <a:ext cx="3657600" cy="640080"/>
+            <a:ext cx="3200400" cy="731520"/>
           </a:xfrm>
           <a:prstGeom prst="rect">
             <a:avLst/>
@@ -3110,21 +3110,34 @@
           <a:noFill/>
         </p:spPr>
         <p:txBody>
-          <a:bodyPr wrap="square">
+          <a:bodyPr wrap="square" lIns="0" tIns="0" rIns="0" bIns="0">
             <a:spAutoFit/>
           </a:bodyPr>
           <a:lstStyle/>
           <a:p>
             <a:pPr>
-              <a:defRPr sz="1300" b="1">
-                <a:solidFill>
-                  <a:srgbClr val="B4141E"/>
+              <a:defRPr sz="1400" b="1">
+                <a:solidFill>
+                  <a:srgbClr val="BE182B"/>
+                </a:solidFill>
+                <a:latin typeface="Arial Black"/>
+              </a:defRPr>
+            </a:pPr>
+            <a:r>
+              <a:t>RAMAIAH</a:t>
+            </a:r>
+          </a:p>
+          <a:p>
+            <a:pPr>
+              <a:defRPr sz="1100">
+                <a:solidFill>
+                  <a:srgbClr val="0F172A"/>
                 </a:solidFill>
                 <a:latin typeface="Arial"/>
               </a:defRPr>
             </a:pPr>
             <a:r>
-              <a:t>RAMAIAH Institute of Technology</a:t>
+              <a:t>Institute of Technology</a:t>
             </a:r>
           </a:p>
         </p:txBody>
@@ -3138,7 +3151,7 @@
         <p:spPr>
           <a:xfrm>
             <a:off x="5120640" y="274320"/>
-            <a:ext cx="2011680" cy="731520"/>
+            <a:ext cx="1950415" cy="822960"/>
           </a:xfrm>
           <a:prstGeom prst="rect">
             <a:avLst/>
@@ -3146,21 +3159,29 @@
           <a:noFill/>
         </p:spPr>
         <p:txBody>
-          <a:bodyPr wrap="none">
+          <a:bodyPr wrap="none" lIns="0" tIns="0" rIns="0" bIns="0">
             <a:spAutoFit/>
           </a:bodyPr>
           <a:lstStyle/>
           <a:p>
-            <a:pPr algn="ctr">
-              <a:defRPr sz="3200" b="1">
-                <a:solidFill>
-                  <a:srgbClr val="EA580C"/>
+            <a:pPr algn="ctr"/>
+            <a:r>
+              <a:rPr sz="3600" b="1">
+                <a:solidFill>
+                  <a:srgbClr val="E73C27"/>
                 </a:solidFill>
                 <a:latin typeface="Arial Black"/>
-              </a:defRPr>
-            </a:pPr>
-            <a:r>
-              <a:t>MLH</a:t>
+              </a:rPr>
+              <a:t>ML</a:t>
+            </a:r>
+            <a:r>
+              <a:rPr sz="3600" b="1">
+                <a:solidFill>
+                  <a:srgbClr val="F59E0B"/>
+                </a:solidFill>
+                <a:latin typeface="Arial Black"/>
+              </a:rPr>
+              <a:t>H</a:t>
             </a:r>
           </a:p>
         </p:txBody>
@@ -3173,8 +3194,8 @@
         </p:nvSpPr>
         <p:spPr>
           <a:xfrm>
-            <a:off x="8412480" y="365760"/>
-            <a:ext cx="3017520" cy="640080"/>
+            <a:off x="8686800" y="365760"/>
+            <a:ext cx="2743200" cy="731520"/>
           </a:xfrm>
           <a:prstGeom prst="rect">
             <a:avLst/>
@@ -3182,21 +3203,34 @@
           <a:noFill/>
         </p:spPr>
         <p:txBody>
-          <a:bodyPr wrap="none">
+          <a:bodyPr wrap="square" lIns="0" tIns="0" rIns="0" bIns="0">
             <a:spAutoFit/>
           </a:bodyPr>
           <a:lstStyle/>
           <a:p>
             <a:pPr algn="r">
-              <a:defRPr sz="1100" b="1">
+              <a:defRPr sz="1200" b="1">
                 <a:solidFill>
                   <a:srgbClr val="0284C7"/>
                 </a:solidFill>
+                <a:latin typeface="Arial Black"/>
+              </a:defRPr>
+            </a:pPr>
+            <a:r>
+              <a:t>IEEE</a:t>
+            </a:r>
+          </a:p>
+          <a:p>
+            <a:pPr algn="r">
+              <a:defRPr sz="1000" b="1">
+                <a:solidFill>
+                  <a:srgbClr val="0F172A"/>
+                </a:solidFill>
                 <a:latin typeface="Arial"/>
               </a:defRPr>
             </a:pPr>
             <a:r>
-              <a:t>IEEE Computational Intelligence Society</a:t>
+              <a:t>Computational Intelligence Society</a:t>
             </a:r>
           </a:p>
         </p:txBody>
@@ -3209,8 +3243,8 @@
         </p:nvSpPr>
         <p:spPr>
           <a:xfrm>
-            <a:off x="731520" y="1051560"/>
-            <a:ext cx="10698480" cy="731520"/>
+            <a:off x="731520" y="1097280"/>
+            <a:ext cx="10728655" cy="685800"/>
           </a:xfrm>
           <a:prstGeom prst="rect">
             <a:avLst/>
@@ -3218,13 +3252,13 @@
           <a:noFill/>
         </p:spPr>
         <p:txBody>
-          <a:bodyPr wrap="none">
+          <a:bodyPr wrap="none" lIns="0" tIns="0" rIns="0" bIns="0">
             <a:spAutoFit/>
           </a:bodyPr>
           <a:lstStyle/>
           <a:p>
             <a:pPr>
-              <a:defRPr sz="2800" b="1">
+              <a:defRPr sz="3200" b="1">
                 <a:solidFill>
                   <a:srgbClr val="0F172A"/>
                 </a:solidFill>
@@ -3239,43 +3273,7 @@
       </p:sp>
       <p:sp>
         <p:nvSpPr>
-          <p:cNvPr id="6" name="TextBox 5"/>
-          <p:cNvSpPr txBox="1"/>
-          <p:nvPr/>
-        </p:nvSpPr>
-        <p:spPr>
-          <a:xfrm>
-            <a:off x="731520" y="6400800"/>
-            <a:ext cx="10698480" cy="320040"/>
-          </a:xfrm>
-          <a:prstGeom prst="rect">
-            <a:avLst/>
-          </a:prstGeom>
-          <a:noFill/>
-        </p:spPr>
-        <p:txBody>
-          <a:bodyPr wrap="none">
-            <a:spAutoFit/>
-          </a:bodyPr>
-          <a:lstStyle/>
-          <a:p>
-            <a:pPr algn="ctr">
-              <a:defRPr sz="1000">
-                <a:solidFill>
-                  <a:srgbClr val="64748B"/>
-                </a:solidFill>
-                <a:latin typeface="Arial"/>
-              </a:defRPr>
-            </a:pPr>
-            <a:r>
-              <a:t>Hacktoberfest Hack Day Bengaluru × IEEE RIT</a:t>
-            </a:r>
-          </a:p>
-        </p:txBody>
-      </p:sp>
-      <p:sp>
-        <p:nvSpPr>
-          <p:cNvPr id="7" name="Rounded Rectangle 6"/>
+          <p:cNvPr id="6" name="Rounded Rectangle 5"/>
           <p:cNvSpPr/>
           <p:nvPr/>
         </p:nvSpPr>
@@ -3288,11 +3286,11 @@
             <a:avLst/>
           </a:prstGeom>
           <a:solidFill>
-            <a:srgbClr val="FFF7ED"/>
+            <a:srgbClr val="FFFFFF"/>
           </a:solidFill>
           <a:ln w="19050">
             <a:solidFill>
-              <a:srgbClr val="FDBA74"/>
+              <a:srgbClr val="FB923C"/>
             </a:solidFill>
           </a:ln>
         </p:spPr>
@@ -3320,14 +3318,14 @@
       </p:sp>
       <p:sp>
         <p:nvSpPr>
-          <p:cNvPr id="8" name="TextBox 7"/>
+          <p:cNvPr id="7" name="TextBox 6"/>
           <p:cNvSpPr txBox="1"/>
           <p:nvPr/>
         </p:nvSpPr>
         <p:spPr>
           <a:xfrm>
-            <a:off x="914400" y="1965960"/>
-            <a:ext cx="10332720" cy="502920"/>
+            <a:off x="914400" y="1984248"/>
+            <a:ext cx="10332720" cy="457200"/>
           </a:xfrm>
           <a:prstGeom prst="rect">
             <a:avLst/>
@@ -3341,7 +3339,7 @@
           <a:lstStyle/>
           <a:p>
             <a:pPr>
-              <a:defRPr sz="1800">
+              <a:defRPr sz="1900" b="1">
                 <a:solidFill>
                   <a:srgbClr val="EA580C"/>
                 </a:solidFill>
@@ -3356,14 +3354,14 @@
       </p:sp>
       <p:sp>
         <p:nvSpPr>
-          <p:cNvPr id="9" name="TextBox 8"/>
+          <p:cNvPr id="8" name="TextBox 7"/>
           <p:cNvSpPr txBox="1"/>
           <p:nvPr/>
         </p:nvSpPr>
         <p:spPr>
           <a:xfrm>
             <a:off x="731520" y="2651760"/>
-            <a:ext cx="10698480" cy="640080"/>
+            <a:ext cx="10728655" cy="685800"/>
           </a:xfrm>
           <a:prstGeom prst="rect">
             <a:avLst/>
@@ -3371,7 +3369,7 @@
           <a:noFill/>
         </p:spPr>
         <p:txBody>
-          <a:bodyPr wrap="none">
+          <a:bodyPr wrap="none" lIns="0" tIns="0" rIns="0" bIns="0">
             <a:spAutoFit/>
           </a:bodyPr>
           <a:lstStyle/>
@@ -3405,24 +3403,24 @@
       </p:sp>
       <p:sp>
         <p:nvSpPr>
-          <p:cNvPr id="10" name="Rounded Rectangle 9"/>
+          <p:cNvPr id="9" name="Rounded Rectangle 8"/>
           <p:cNvSpPr/>
           <p:nvPr/>
         </p:nvSpPr>
         <p:spPr>
           <a:xfrm>
-            <a:off x="731520" y="3383280"/>
-            <a:ext cx="10728655" cy="548640"/>
+            <a:off x="731520" y="3474720"/>
+            <a:ext cx="10728655" cy="594360"/>
           </a:xfrm>
           <a:prstGeom prst="roundRect">
             <a:avLst/>
           </a:prstGeom>
           <a:solidFill>
-            <a:srgbClr val="F8FAFC"/>
+            <a:srgbClr val="FFFFFF"/>
           </a:solidFill>
-          <a:ln w="12700">
+          <a:ln w="19050">
             <a:solidFill>
-              <a:srgbClr val="CBD5E1"/>
+              <a:srgbClr val="14B8A6"/>
             </a:solidFill>
           </a:ln>
         </p:spPr>
@@ -3450,14 +3448,14 @@
       </p:sp>
       <p:sp>
         <p:nvSpPr>
-          <p:cNvPr id="11" name="TextBox 10"/>
+          <p:cNvPr id="10" name="TextBox 9"/>
           <p:cNvSpPr txBox="1"/>
           <p:nvPr/>
         </p:nvSpPr>
         <p:spPr>
           <a:xfrm>
-            <a:off x="914400" y="3456432"/>
-            <a:ext cx="10332720" cy="411480"/>
+            <a:off x="914400" y="3584448"/>
+            <a:ext cx="1645920" cy="411480"/>
           </a:xfrm>
           <a:prstGeom prst="rect">
             <a:avLst/>
@@ -3465,59 +3463,44 @@
           <a:noFill/>
         </p:spPr>
         <p:txBody>
-          <a:bodyPr wrap="none">
+          <a:bodyPr wrap="none" lIns="0" tIns="0" rIns="0" bIns="0">
             <a:spAutoFit/>
           </a:bodyPr>
           <a:lstStyle/>
           <a:p>
-            <a:r>
-              <a:rPr b="1" sz="1200">
+            <a:pPr>
+              <a:defRPr sz="1200" b="1">
                 <a:solidFill>
                   <a:srgbClr val="0D9488"/>
                 </a:solidFill>
-              </a:rPr>
-              <a:t>LEAD         |  </a:t>
-            </a:r>
-            <a:r>
-              <a:rPr b="1" sz="1200">
-                <a:solidFill>
-                  <a:srgbClr val="0F172A"/>
-                </a:solidFill>
-              </a:rPr>
-              <a:t>JAYANTH.D </a:t>
-            </a:r>
-            <a:r>
-              <a:rPr sz="1100">
-                <a:solidFill>
-                  <a:srgbClr val="64748B"/>
-                </a:solidFill>
-              </a:rPr>
-              <a:t>—  jayanthedu1116@gmail.com (Full-Stack &amp; Architecture)</a:t>
-            </a:r>
-          </a:p>
-        </p:txBody>
-      </p:sp>
-      <p:sp>
-        <p:nvSpPr>
-          <p:cNvPr id="12" name="Rounded Rectangle 11"/>
+                <a:latin typeface="Arial"/>
+              </a:defRPr>
+            </a:pPr>
+            <a:r>
+              <a:t>LEAD</a:t>
+            </a:r>
+          </a:p>
+        </p:txBody>
+      </p:sp>
+      <p:sp>
+        <p:nvSpPr>
+          <p:cNvPr id="11" name="Rectangle 10"/>
           <p:cNvSpPr/>
           <p:nvPr/>
         </p:nvSpPr>
         <p:spPr>
           <a:xfrm>
-            <a:off x="731520" y="4041648"/>
-            <a:ext cx="10728655" cy="548640"/>
-          </a:xfrm>
-          <a:prstGeom prst="roundRect">
+            <a:off x="2651760" y="3566160"/>
+            <a:ext cx="18288" cy="411480"/>
+          </a:xfrm>
+          <a:prstGeom prst="rect">
             <a:avLst/>
           </a:prstGeom>
           <a:solidFill>
-            <a:srgbClr val="F8FAFC"/>
+            <a:srgbClr val="E2E8F0"/>
           </a:solidFill>
-          <a:ln w="12700">
-            <a:solidFill>
-              <a:srgbClr val="CBD5E1"/>
-            </a:solidFill>
+          <a:ln>
+            <a:noFill/>
           </a:ln>
         </p:spPr>
         <p:style>
@@ -3544,14 +3527,14 @@
       </p:sp>
       <p:sp>
         <p:nvSpPr>
-          <p:cNvPr id="13" name="TextBox 12"/>
+          <p:cNvPr id="12" name="TextBox 11"/>
           <p:cNvSpPr txBox="1"/>
           <p:nvPr/>
         </p:nvSpPr>
         <p:spPr>
           <a:xfrm>
-            <a:off x="914400" y="4114800"/>
-            <a:ext cx="10332720" cy="411480"/>
+            <a:off x="2834640" y="3547872"/>
+            <a:ext cx="8412480" cy="457200"/>
           </a:xfrm>
           <a:prstGeom prst="rect">
             <a:avLst/>
@@ -3559,58 +3542,58 @@
           <a:noFill/>
         </p:spPr>
         <p:txBody>
-          <a:bodyPr wrap="none">
+          <a:bodyPr wrap="none" lIns="0" tIns="0" rIns="0" bIns="0">
             <a:spAutoFit/>
           </a:bodyPr>
           <a:lstStyle/>
           <a:p>
-            <a:r>
-              <a:rPr b="1" sz="1200">
-                <a:solidFill>
-                  <a:srgbClr val="0D9488"/>
-                </a:solidFill>
-              </a:rPr>
-              <a:t>MEMBER 2     |  </a:t>
-            </a:r>
-            <a:r>
-              <a:rPr b="1" sz="1200">
+            <a:pPr>
+              <a:defRPr sz="1200" b="1">
                 <a:solidFill>
                   <a:srgbClr val="0F172A"/>
                 </a:solidFill>
-              </a:rPr>
-              <a:t>DHANUSH.R </a:t>
-            </a:r>
-            <a:r>
-              <a:rPr sz="1100">
-                <a:solidFill>
-                  <a:srgbClr val="64748B"/>
-                </a:solidFill>
-              </a:rPr>
-              <a:t>—  Backend Systems, Header Parsers &amp; Forensic Engine</a:t>
-            </a:r>
-          </a:p>
-        </p:txBody>
-      </p:sp>
-      <p:sp>
-        <p:nvSpPr>
-          <p:cNvPr id="14" name="Rounded Rectangle 13"/>
+                <a:latin typeface="Arial Black"/>
+              </a:defRPr>
+            </a:pPr>
+            <a:r>
+              <a:t>JAYANTH.D</a:t>
+            </a:r>
+          </a:p>
+          <a:p>
+            <a:pPr>
+              <a:defRPr sz="1100" b="1">
+                <a:solidFill>
+                  <a:srgbClr val="1D4ED8"/>
+                </a:solidFill>
+                <a:latin typeface="Arial"/>
+              </a:defRPr>
+            </a:pPr>
+            <a:r>
+              <a:t>jayanthedu1116@gmail.com</a:t>
+            </a:r>
+          </a:p>
+        </p:txBody>
+      </p:sp>
+      <p:sp>
+        <p:nvSpPr>
+          <p:cNvPr id="13" name="Rounded Rectangle 12"/>
           <p:cNvSpPr/>
           <p:nvPr/>
         </p:nvSpPr>
         <p:spPr>
           <a:xfrm>
-            <a:off x="731520" y="4700016"/>
-            <a:ext cx="10728655" cy="548640"/>
+            <a:off x="731520" y="4160520"/>
+            <a:ext cx="10728655" cy="594360"/>
           </a:xfrm>
           <a:prstGeom prst="roundRect">
             <a:avLst/>
           </a:prstGeom>
           <a:solidFill>
-            <a:srgbClr val="F8FAFC"/>
+            <a:srgbClr val="FFFFFF"/>
           </a:solidFill>
-          <a:ln w="12700">
+          <a:ln w="19050">
             <a:solidFill>
-              <a:srgbClr val="CBD5E1"/>
+              <a:srgbClr val="14B8A6"/>
             </a:solidFill>
           </a:ln>
         </p:spPr>
@@ -3638,14 +3621,14 @@
       </p:sp>
       <p:sp>
         <p:nvSpPr>
-          <p:cNvPr id="15" name="TextBox 14"/>
+          <p:cNvPr id="14" name="TextBox 13"/>
           <p:cNvSpPr txBox="1"/>
           <p:nvPr/>
         </p:nvSpPr>
         <p:spPr>
           <a:xfrm>
-            <a:off x="914400" y="4773168"/>
-            <a:ext cx="10332720" cy="411480"/>
+            <a:off x="914400" y="4270248"/>
+            <a:ext cx="1645920" cy="411480"/>
           </a:xfrm>
           <a:prstGeom prst="rect">
             <a:avLst/>
@@ -3653,59 +3636,44 @@
           <a:noFill/>
         </p:spPr>
         <p:txBody>
-          <a:bodyPr wrap="none">
+          <a:bodyPr wrap="none" lIns="0" tIns="0" rIns="0" bIns="0">
             <a:spAutoFit/>
           </a:bodyPr>
           <a:lstStyle/>
           <a:p>
-            <a:r>
-              <a:rPr b="1" sz="1200">
+            <a:pPr>
+              <a:defRPr sz="1200" b="1">
                 <a:solidFill>
                   <a:srgbClr val="0D9488"/>
                 </a:solidFill>
-              </a:rPr>
-              <a:t>MEMBER 3     |  </a:t>
-            </a:r>
-            <a:r>
-              <a:rPr b="1" sz="1200">
-                <a:solidFill>
-                  <a:srgbClr val="0F172A"/>
-                </a:solidFill>
-              </a:rPr>
-              <a:t>VISHAL.R </a:t>
-            </a:r>
-            <a:r>
-              <a:rPr sz="1100">
-                <a:solidFill>
-                  <a:srgbClr val="64748B"/>
-                </a:solidFill>
-              </a:rPr>
-              <a:t>—  AI Training, NVIDIA NIM Integration &amp; LLM Consensus</a:t>
-            </a:r>
-          </a:p>
-        </p:txBody>
-      </p:sp>
-      <p:sp>
-        <p:nvSpPr>
-          <p:cNvPr id="16" name="Rounded Rectangle 15"/>
+                <a:latin typeface="Arial"/>
+              </a:defRPr>
+            </a:pPr>
+            <a:r>
+              <a:t>MEMBER 2</a:t>
+            </a:r>
+          </a:p>
+        </p:txBody>
+      </p:sp>
+      <p:sp>
+        <p:nvSpPr>
+          <p:cNvPr id="15" name="Rectangle 14"/>
           <p:cNvSpPr/>
           <p:nvPr/>
         </p:nvSpPr>
         <p:spPr>
           <a:xfrm>
-            <a:off x="731520" y="5358383"/>
-            <a:ext cx="10728655" cy="548640"/>
-          </a:xfrm>
-          <a:prstGeom prst="roundRect">
+            <a:off x="2651760" y="4251959"/>
+            <a:ext cx="18288" cy="411480"/>
+          </a:xfrm>
+          <a:prstGeom prst="rect">
             <a:avLst/>
           </a:prstGeom>
           <a:solidFill>
-            <a:srgbClr val="F8FAFC"/>
+            <a:srgbClr val="E2E8F0"/>
           </a:solidFill>
-          <a:ln w="12700">
-            <a:solidFill>
-              <a:srgbClr val="CBD5E1"/>
-            </a:solidFill>
+          <a:ln>
+            <a:noFill/>
           </a:ln>
         </p:spPr>
         <p:style>
@@ -3732,14 +3700,14 @@
       </p:sp>
       <p:sp>
         <p:nvSpPr>
-          <p:cNvPr id="17" name="TextBox 16"/>
+          <p:cNvPr id="16" name="TextBox 15"/>
           <p:cNvSpPr txBox="1"/>
           <p:nvPr/>
         </p:nvSpPr>
         <p:spPr>
           <a:xfrm>
-            <a:off x="914400" y="5431536"/>
-            <a:ext cx="10332720" cy="411480"/>
+            <a:off x="2834640" y="4233672"/>
+            <a:ext cx="8412480" cy="457200"/>
           </a:xfrm>
           <a:prstGeom prst="rect">
             <a:avLst/>
@@ -3747,35 +3715,80 @@
           <a:noFill/>
         </p:spPr>
         <p:txBody>
-          <a:bodyPr wrap="none">
+          <a:bodyPr wrap="none" lIns="0" tIns="0" rIns="0" bIns="0">
             <a:spAutoFit/>
           </a:bodyPr>
           <a:lstStyle/>
           <a:p>
-            <a:r>
-              <a:rPr b="1" sz="1200">
-                <a:solidFill>
-                  <a:srgbClr val="0D9488"/>
-                </a:solidFill>
-              </a:rPr>
-              <a:t>MEMBER 4     |  </a:t>
-            </a:r>
-            <a:r>
-              <a:rPr b="1" sz="1200">
+            <a:pPr>
+              <a:defRPr sz="1200" b="1">
                 <a:solidFill>
                   <a:srgbClr val="0F172A"/>
                 </a:solidFill>
-              </a:rPr>
-              <a:t>ARPITHA </a:t>
-            </a:r>
-            <a:r>
-              <a:rPr sz="1100">
-                <a:solidFill>
-                  <a:srgbClr val="64748B"/>
-                </a:solidFill>
-              </a:rPr>
-              <a:t>—  Cybersecurity Research, Threat Feeds &amp; RFC 3161 Verification</a:t>
-            </a:r>
+                <a:latin typeface="Arial"/>
+              </a:defRPr>
+            </a:pPr>
+            <a:r>
+              <a:t>DHANUSH.R</a:t>
+            </a:r>
+          </a:p>
+          <a:p>
+            <a:pPr>
+              <a:defRPr sz="1100" b="1">
+                <a:solidFill>
+                  <a:srgbClr val="0F172A"/>
+                </a:solidFill>
+                <a:latin typeface="Arial"/>
+              </a:defRPr>
+            </a:pPr>
+            <a:r>
+              <a:t>(BACKEND)</a:t>
+            </a:r>
+          </a:p>
+        </p:txBody>
+      </p:sp>
+      <p:sp>
+        <p:nvSpPr>
+          <p:cNvPr id="17" name="Rounded Rectangle 16"/>
+          <p:cNvSpPr/>
+          <p:nvPr/>
+        </p:nvSpPr>
+        <p:spPr>
+          <a:xfrm>
+            <a:off x="731520" y="4846320"/>
+            <a:ext cx="10728655" cy="594360"/>
+          </a:xfrm>
+          <a:prstGeom prst="roundRect">
+            <a:avLst/>
+          </a:prstGeom>
+          <a:solidFill>
+            <a:srgbClr val="FFFFFF"/>
+          </a:solidFill>
+          <a:ln w="19050">
+            <a:solidFill>
+              <a:srgbClr val="14B8A6"/>
+            </a:solidFill>
+          </a:ln>
+        </p:spPr>
+        <p:style>
+          <a:lnRef idx="1">
+            <a:schemeClr val="accent1"/>
+          </a:lnRef>
+          <a:fillRef idx="3">
+            <a:schemeClr val="accent1"/>
+          </a:fillRef>
+          <a:effectRef idx="2">
+            <a:schemeClr val="accent1"/>
+          </a:effectRef>
+          <a:fontRef idx="minor">
+            <a:schemeClr val="lt1"/>
+          </a:fontRef>
+        </p:style>
+        <p:txBody>
+          <a:bodyPr rtlCol="0" anchor="ctr"/>
+          <a:lstStyle/>
+          <a:p>
+            <a:pPr algn="ctr"/>
           </a:p>
         </p:txBody>
       </p:sp>
@@ -3787,8 +3800,8 @@
         </p:nvSpPr>
         <p:spPr>
           <a:xfrm>
-            <a:off x="731520" y="6016752"/>
-            <a:ext cx="10698480" cy="320040"/>
+            <a:off x="914400" y="4956048"/>
+            <a:ext cx="1645920" cy="411480"/>
           </a:xfrm>
           <a:prstGeom prst="rect">
             <a:avLst/>
@@ -3796,20 +3809,322 @@
           <a:noFill/>
         </p:spPr>
         <p:txBody>
-          <a:bodyPr wrap="none">
+          <a:bodyPr wrap="none" lIns="0" tIns="0" rIns="0" bIns="0">
             <a:spAutoFit/>
           </a:bodyPr>
           <a:lstStyle/>
           <a:p>
             <a:pPr>
-              <a:defRPr sz="1000" b="1">
+              <a:defRPr sz="1200" b="1">
                 <a:solidFill>
                   <a:srgbClr val="0D9488"/>
                 </a:solidFill>
-              </a:defRPr>
-            </a:pPr>
-            <a:r>
-              <a:t>NOTE: ALL TEAM MEMBERS REGISTERED INDIVIDUALLY ON ORGANIZERHQ.</a:t>
+                <a:latin typeface="Arial"/>
+              </a:defRPr>
+            </a:pPr>
+            <a:r>
+              <a:t>MEMBER 3</a:t>
+            </a:r>
+          </a:p>
+        </p:txBody>
+      </p:sp>
+      <p:sp>
+        <p:nvSpPr>
+          <p:cNvPr id="19" name="Rectangle 18"/>
+          <p:cNvSpPr/>
+          <p:nvPr/>
+        </p:nvSpPr>
+        <p:spPr>
+          <a:xfrm>
+            <a:off x="2651760" y="4937759"/>
+            <a:ext cx="18288" cy="411480"/>
+          </a:xfrm>
+          <a:prstGeom prst="rect">
+            <a:avLst/>
+          </a:prstGeom>
+          <a:solidFill>
+            <a:srgbClr val="E2E8F0"/>
+          </a:solidFill>
+          <a:ln>
+            <a:noFill/>
+          </a:ln>
+        </p:spPr>
+        <p:style>
+          <a:lnRef idx="1">
+            <a:schemeClr val="accent1"/>
+          </a:lnRef>
+          <a:fillRef idx="3">
+            <a:schemeClr val="accent1"/>
+          </a:fillRef>
+          <a:effectRef idx="2">
+            <a:schemeClr val="accent1"/>
+          </a:effectRef>
+          <a:fontRef idx="minor">
+            <a:schemeClr val="lt1"/>
+          </a:fontRef>
+        </p:style>
+        <p:txBody>
+          <a:bodyPr rtlCol="0" anchor="ctr"/>
+          <a:lstStyle/>
+          <a:p>
+            <a:pPr algn="ctr"/>
+          </a:p>
+        </p:txBody>
+      </p:sp>
+      <p:sp>
+        <p:nvSpPr>
+          <p:cNvPr id="20" name="TextBox 19"/>
+          <p:cNvSpPr txBox="1"/>
+          <p:nvPr/>
+        </p:nvSpPr>
+        <p:spPr>
+          <a:xfrm>
+            <a:off x="2834640" y="4919472"/>
+            <a:ext cx="8412480" cy="457200"/>
+          </a:xfrm>
+          <a:prstGeom prst="rect">
+            <a:avLst/>
+          </a:prstGeom>
+          <a:noFill/>
+        </p:spPr>
+        <p:txBody>
+          <a:bodyPr wrap="none" lIns="0" tIns="0" rIns="0" bIns="0">
+            <a:spAutoFit/>
+          </a:bodyPr>
+          <a:lstStyle/>
+          <a:p>
+            <a:pPr>
+              <a:defRPr sz="1200" b="1">
+                <a:solidFill>
+                  <a:srgbClr val="0F172A"/>
+                </a:solidFill>
+                <a:latin typeface="Arial"/>
+              </a:defRPr>
+            </a:pPr>
+            <a:r>
+              <a:t>VISHAL.R (AI</a:t>
+            </a:r>
+          </a:p>
+          <a:p>
+            <a:pPr>
+              <a:defRPr sz="1100" b="1">
+                <a:solidFill>
+                  <a:srgbClr val="0F172A"/>
+                </a:solidFill>
+                <a:latin typeface="Arial"/>
+              </a:defRPr>
+            </a:pPr>
+            <a:r>
+              <a:t>TRAINING)</a:t>
+            </a:r>
+          </a:p>
+        </p:txBody>
+      </p:sp>
+      <p:sp>
+        <p:nvSpPr>
+          <p:cNvPr id="21" name="Rounded Rectangle 20"/>
+          <p:cNvSpPr/>
+          <p:nvPr/>
+        </p:nvSpPr>
+        <p:spPr>
+          <a:xfrm>
+            <a:off x="731520" y="5532120"/>
+            <a:ext cx="10728655" cy="594360"/>
+          </a:xfrm>
+          <a:prstGeom prst="roundRect">
+            <a:avLst/>
+          </a:prstGeom>
+          <a:solidFill>
+            <a:srgbClr val="FFFFFF"/>
+          </a:solidFill>
+          <a:ln w="19050">
+            <a:solidFill>
+              <a:srgbClr val="14B8A6"/>
+            </a:solidFill>
+          </a:ln>
+        </p:spPr>
+        <p:style>
+          <a:lnRef idx="1">
+            <a:schemeClr val="accent1"/>
+          </a:lnRef>
+          <a:fillRef idx="3">
+            <a:schemeClr val="accent1"/>
+          </a:fillRef>
+          <a:effectRef idx="2">
+            <a:schemeClr val="accent1"/>
+          </a:effectRef>
+          <a:fontRef idx="minor">
+            <a:schemeClr val="lt1"/>
+          </a:fontRef>
+        </p:style>
+        <p:txBody>
+          <a:bodyPr rtlCol="0" anchor="ctr"/>
+          <a:lstStyle/>
+          <a:p>
+            <a:pPr algn="ctr"/>
+          </a:p>
+        </p:txBody>
+      </p:sp>
+      <p:sp>
+        <p:nvSpPr>
+          <p:cNvPr id="22" name="TextBox 21"/>
+          <p:cNvSpPr txBox="1"/>
+          <p:nvPr/>
+        </p:nvSpPr>
+        <p:spPr>
+          <a:xfrm>
+            <a:off x="914400" y="5641848"/>
+            <a:ext cx="1645920" cy="411480"/>
+          </a:xfrm>
+          <a:prstGeom prst="rect">
+            <a:avLst/>
+          </a:prstGeom>
+          <a:noFill/>
+        </p:spPr>
+        <p:txBody>
+          <a:bodyPr wrap="none" lIns="0" tIns="0" rIns="0" bIns="0">
+            <a:spAutoFit/>
+          </a:bodyPr>
+          <a:lstStyle/>
+          <a:p>
+            <a:pPr>
+              <a:defRPr sz="1200" b="1">
+                <a:solidFill>
+                  <a:srgbClr val="0D9488"/>
+                </a:solidFill>
+                <a:latin typeface="Arial"/>
+              </a:defRPr>
+            </a:pPr>
+            <a:r>
+              <a:t>MEMBER 4</a:t>
+            </a:r>
+          </a:p>
+        </p:txBody>
+      </p:sp>
+      <p:sp>
+        <p:nvSpPr>
+          <p:cNvPr id="23" name="Rectangle 22"/>
+          <p:cNvSpPr/>
+          <p:nvPr/>
+        </p:nvSpPr>
+        <p:spPr>
+          <a:xfrm>
+            <a:off x="2651760" y="5623559"/>
+            <a:ext cx="18288" cy="411480"/>
+          </a:xfrm>
+          <a:prstGeom prst="rect">
+            <a:avLst/>
+          </a:prstGeom>
+          <a:solidFill>
+            <a:srgbClr val="E2E8F0"/>
+          </a:solidFill>
+          <a:ln>
+            <a:noFill/>
+          </a:ln>
+        </p:spPr>
+        <p:style>
+          <a:lnRef idx="1">
+            <a:schemeClr val="accent1"/>
+          </a:lnRef>
+          <a:fillRef idx="3">
+            <a:schemeClr val="accent1"/>
+          </a:fillRef>
+          <a:effectRef idx="2">
+            <a:schemeClr val="accent1"/>
+          </a:effectRef>
+          <a:fontRef idx="minor">
+            <a:schemeClr val="lt1"/>
+          </a:fontRef>
+        </p:style>
+        <p:txBody>
+          <a:bodyPr rtlCol="0" anchor="ctr"/>
+          <a:lstStyle/>
+          <a:p>
+            <a:pPr algn="ctr"/>
+          </a:p>
+        </p:txBody>
+      </p:sp>
+      <p:sp>
+        <p:nvSpPr>
+          <p:cNvPr id="24" name="TextBox 23"/>
+          <p:cNvSpPr txBox="1"/>
+          <p:nvPr/>
+        </p:nvSpPr>
+        <p:spPr>
+          <a:xfrm>
+            <a:off x="2834640" y="5605272"/>
+            <a:ext cx="8412480" cy="457200"/>
+          </a:xfrm>
+          <a:prstGeom prst="rect">
+            <a:avLst/>
+          </a:prstGeom>
+          <a:noFill/>
+        </p:spPr>
+        <p:txBody>
+          <a:bodyPr wrap="none" lIns="0" tIns="0" rIns="0" bIns="0">
+            <a:spAutoFit/>
+          </a:bodyPr>
+          <a:lstStyle/>
+          <a:p>
+            <a:pPr>
+              <a:defRPr sz="1200" b="1">
+                <a:solidFill>
+                  <a:srgbClr val="0F172A"/>
+                </a:solidFill>
+                <a:latin typeface="Arial"/>
+              </a:defRPr>
+            </a:pPr>
+            <a:r>
+              <a:t>ARPITHA (</a:t>
+            </a:r>
+          </a:p>
+          <a:p>
+            <a:pPr>
+              <a:defRPr sz="1100" b="1">
+                <a:solidFill>
+                  <a:srgbClr val="0F172A"/>
+                </a:solidFill>
+                <a:latin typeface="Arial"/>
+              </a:defRPr>
+            </a:pPr>
+            <a:r>
+              <a:t>RESEARCHER)</a:t>
+            </a:r>
+          </a:p>
+        </p:txBody>
+      </p:sp>
+      <p:sp>
+        <p:nvSpPr>
+          <p:cNvPr id="25" name="TextBox 24"/>
+          <p:cNvSpPr txBox="1"/>
+          <p:nvPr/>
+        </p:nvSpPr>
+        <p:spPr>
+          <a:xfrm>
+            <a:off x="731520" y="6291072"/>
+            <a:ext cx="10728655" cy="320040"/>
+          </a:xfrm>
+          <a:prstGeom prst="rect">
+            <a:avLst/>
+          </a:prstGeom>
+          <a:noFill/>
+        </p:spPr>
+        <p:txBody>
+          <a:bodyPr wrap="none" lIns="0" tIns="0" rIns="0" bIns="0">
+            <a:spAutoFit/>
+          </a:bodyPr>
+          <a:lstStyle/>
+          <a:p>
+            <a:pPr>
+              <a:defRPr sz="1050" b="1">
+                <a:solidFill>
+                  <a:srgbClr val="0D9488"/>
+                </a:solidFill>
+                <a:latin typeface="Arial"/>
+              </a:defRPr>
+            </a:pPr>
+            <a:r>
+              <a:t>NOTE: ALL TEAM MEMBERS MUST REGISTER INDIVIDUALLY ON ORGANIZERHQ.</a:t>
             </a:r>
           </a:p>
         </p:txBody>
@@ -3841,7 +4156,7 @@
         <p:spPr>
           <a:xfrm>
             <a:off x="731520" y="365760"/>
-            <a:ext cx="3657600" cy="640080"/>
+            <a:ext cx="3200400" cy="731520"/>
           </a:xfrm>
           <a:prstGeom prst="rect">
             <a:avLst/>
@@ -3849,21 +4164,34 @@
           <a:noFill/>
         </p:spPr>
         <p:txBody>
-          <a:bodyPr wrap="square">
+          <a:bodyPr wrap="square" lIns="0" tIns="0" rIns="0" bIns="0">
             <a:spAutoFit/>
           </a:bodyPr>
           <a:lstStyle/>
           <a:p>
             <a:pPr>
-              <a:defRPr sz="1300" b="1">
-                <a:solidFill>
-                  <a:srgbClr val="B4141E"/>
+              <a:defRPr sz="1400" b="1">
+                <a:solidFill>
+                  <a:srgbClr val="BE182B"/>
+                </a:solidFill>
+                <a:latin typeface="Arial Black"/>
+              </a:defRPr>
+            </a:pPr>
+            <a:r>
+              <a:t>RAMAIAH</a:t>
+            </a:r>
+          </a:p>
+          <a:p>
+            <a:pPr>
+              <a:defRPr sz="1100">
+                <a:solidFill>
+                  <a:srgbClr val="0F172A"/>
                 </a:solidFill>
                 <a:latin typeface="Arial"/>
               </a:defRPr>
             </a:pPr>
             <a:r>
-              <a:t>RAMAIAH Institute of Technology</a:t>
+              <a:t>Institute of Technology</a:t>
             </a:r>
           </a:p>
         </p:txBody>
@@ -3877,7 +4205,7 @@
         <p:spPr>
           <a:xfrm>
             <a:off x="5120640" y="274320"/>
-            <a:ext cx="2011680" cy="731520"/>
+            <a:ext cx="1950415" cy="822960"/>
           </a:xfrm>
           <a:prstGeom prst="rect">
             <a:avLst/>
@@ -3885,21 +4213,29 @@
           <a:noFill/>
         </p:spPr>
         <p:txBody>
-          <a:bodyPr wrap="none">
+          <a:bodyPr wrap="none" lIns="0" tIns="0" rIns="0" bIns="0">
             <a:spAutoFit/>
           </a:bodyPr>
           <a:lstStyle/>
           <a:p>
-            <a:pPr algn="ctr">
-              <a:defRPr sz="3200" b="1">
-                <a:solidFill>
-                  <a:srgbClr val="EA580C"/>
+            <a:pPr algn="ctr"/>
+            <a:r>
+              <a:rPr sz="3600" b="1">
+                <a:solidFill>
+                  <a:srgbClr val="E73C27"/>
                 </a:solidFill>
                 <a:latin typeface="Arial Black"/>
-              </a:defRPr>
-            </a:pPr>
-            <a:r>
-              <a:t>MLH</a:t>
+              </a:rPr>
+              <a:t>ML</a:t>
+            </a:r>
+            <a:r>
+              <a:rPr sz="3600" b="1">
+                <a:solidFill>
+                  <a:srgbClr val="F59E0B"/>
+                </a:solidFill>
+                <a:latin typeface="Arial Black"/>
+              </a:rPr>
+              <a:t>H</a:t>
             </a:r>
           </a:p>
         </p:txBody>
@@ -3912,8 +4248,8 @@
         </p:nvSpPr>
         <p:spPr>
           <a:xfrm>
-            <a:off x="8412480" y="365760"/>
-            <a:ext cx="3017520" cy="640080"/>
+            <a:off x="8686800" y="365760"/>
+            <a:ext cx="2743200" cy="731520"/>
           </a:xfrm>
           <a:prstGeom prst="rect">
             <a:avLst/>
@@ -3921,21 +4257,34 @@
           <a:noFill/>
         </p:spPr>
         <p:txBody>
-          <a:bodyPr wrap="none">
+          <a:bodyPr wrap="square" lIns="0" tIns="0" rIns="0" bIns="0">
             <a:spAutoFit/>
           </a:bodyPr>
           <a:lstStyle/>
           <a:p>
             <a:pPr algn="r">
-              <a:defRPr sz="1100" b="1">
+              <a:defRPr sz="1200" b="1">
                 <a:solidFill>
                   <a:srgbClr val="0284C7"/>
                 </a:solidFill>
+                <a:latin typeface="Arial Black"/>
+              </a:defRPr>
+            </a:pPr>
+            <a:r>
+              <a:t>IEEE</a:t>
+            </a:r>
+          </a:p>
+          <a:p>
+            <a:pPr algn="r">
+              <a:defRPr sz="1000" b="1">
+                <a:solidFill>
+                  <a:srgbClr val="0F172A"/>
+                </a:solidFill>
                 <a:latin typeface="Arial"/>
               </a:defRPr>
             </a:pPr>
             <a:r>
-              <a:t>IEEE Computational Intelligence Society</a:t>
+              <a:t>Computational Intelligence Society</a:t>
             </a:r>
           </a:p>
         </p:txBody>
@@ -3948,8 +4297,8 @@
         </p:nvSpPr>
         <p:spPr>
           <a:xfrm>
-            <a:off x="731520" y="1051560"/>
-            <a:ext cx="10698480" cy="731520"/>
+            <a:off x="731520" y="1097280"/>
+            <a:ext cx="10728655" cy="685800"/>
           </a:xfrm>
           <a:prstGeom prst="rect">
             <a:avLst/>
@@ -3957,13 +4306,13 @@
           <a:noFill/>
         </p:spPr>
         <p:txBody>
-          <a:bodyPr wrap="none">
+          <a:bodyPr wrap="none" lIns="0" tIns="0" rIns="0" bIns="0">
             <a:spAutoFit/>
           </a:bodyPr>
           <a:lstStyle/>
           <a:p>
             <a:pPr>
-              <a:defRPr sz="2800" b="1">
+              <a:defRPr sz="3200" b="1">
                 <a:solidFill>
                   <a:srgbClr val="0F172A"/>
                 </a:solidFill>
@@ -3984,8 +4333,8 @@
         </p:nvSpPr>
         <p:spPr>
           <a:xfrm>
-            <a:off x="731520" y="6400800"/>
-            <a:ext cx="10698480" cy="320040"/>
+            <a:off x="731520" y="6446520"/>
+            <a:ext cx="10728655" cy="274320"/>
           </a:xfrm>
           <a:prstGeom prst="rect">
             <a:avLst/>
@@ -3993,15 +4342,15 @@
           <a:noFill/>
         </p:spPr>
         <p:txBody>
-          <a:bodyPr wrap="none">
+          <a:bodyPr wrap="none" lIns="0" tIns="0" rIns="0" bIns="0">
             <a:spAutoFit/>
           </a:bodyPr>
           <a:lstStyle/>
           <a:p>
             <a:pPr algn="ctr">
-              <a:defRPr sz="1000">
-                <a:solidFill>
-                  <a:srgbClr val="64748B"/>
+              <a:defRPr sz="1050">
+                <a:solidFill>
+                  <a:srgbClr val="475569"/>
                 </a:solidFill>
                 <a:latin typeface="Arial"/>
               </a:defRPr>
@@ -4020,18 +4369,18 @@
         </p:nvSpPr>
         <p:spPr>
           <a:xfrm>
-            <a:off x="731520" y="1920240"/>
-            <a:ext cx="5166360" cy="2011680"/>
+            <a:off x="731520" y="1874519"/>
+            <a:ext cx="5166360" cy="2103120"/>
           </a:xfrm>
           <a:prstGeom prst="roundRect">
             <a:avLst/>
           </a:prstGeom>
           <a:solidFill>
-            <a:srgbClr val="F8FAFC"/>
+            <a:srgbClr val="FFFFFF"/>
           </a:solidFill>
           <a:ln w="19050">
             <a:solidFill>
-              <a:srgbClr val="CBD5E1"/>
+              <a:srgbClr val="E2E8F0"/>
             </a:solidFill>
           </a:ln>
         </p:spPr>
@@ -4059,92 +4408,24 @@
       </p:sp>
       <p:sp>
         <p:nvSpPr>
-          <p:cNvPr id="8" name="TextBox 7"/>
-          <p:cNvSpPr txBox="1"/>
-          <p:nvPr/>
-        </p:nvSpPr>
-        <p:spPr>
-          <a:xfrm>
-            <a:off x="914400" y="2057400"/>
-            <a:ext cx="4800600" cy="1737360"/>
-          </a:xfrm>
-          <a:prstGeom prst="rect">
-            <a:avLst/>
-          </a:prstGeom>
-          <a:noFill/>
-        </p:spPr>
-        <p:txBody>
-          <a:bodyPr wrap="square">
-            <a:spAutoFit/>
-          </a:bodyPr>
-          <a:lstStyle/>
-          <a:p>
-            <a:pPr>
-              <a:defRPr sz="1000" b="1">
-                <a:solidFill>
-                  <a:srgbClr val="0D9488"/>
-                </a:solidFill>
-                <a:latin typeface="Arial"/>
-              </a:defRPr>
-            </a:pPr>
-            <a:r>
-              <a:t>TARGET AUDIENCE</a:t>
-            </a:r>
-          </a:p>
-          <a:p>
-            <a:pPr>
-              <a:spcAft>
-                <a:spcPts val="300"/>
-              </a:spcAft>
-              <a:defRPr sz="1100">
-                <a:solidFill>
-                  <a:srgbClr val="1E293B"/>
-                </a:solidFill>
-                <a:latin typeface="Arial"/>
-              </a:defRPr>
-            </a:pPr>
-            <a:r>
-              <a:t>Security Operations Centers (SOC), incident response teams, enterprise fraud departments, financial institutions, and universities.</a:t>
-            </a:r>
-          </a:p>
-          <a:p>
-            <a:pPr>
-              <a:spcAft>
-                <a:spcPts val="300"/>
-              </a:spcAft>
-              <a:defRPr sz="1100">
-                <a:solidFill>
-                  <a:srgbClr val="1E293B"/>
-                </a:solidFill>
-                <a:latin typeface="Arial"/>
-              </a:defRPr>
-            </a:pPr>
-            <a:r>
-              <a:t>Also protects students and non-technical staff targeted by daily phishing campaigns.</a:t>
-            </a:r>
-          </a:p>
-        </p:txBody>
-      </p:sp>
-      <p:sp>
-        <p:nvSpPr>
-          <p:cNvPr id="9" name="Rounded Rectangle 8"/>
+          <p:cNvPr id="8" name="Rounded Rectangle 7"/>
           <p:cNvSpPr/>
           <p:nvPr/>
         </p:nvSpPr>
         <p:spPr>
           <a:xfrm>
-            <a:off x="6263640" y="1920240"/>
-            <a:ext cx="5166360" cy="2011680"/>
+            <a:off x="960120" y="2075687"/>
+            <a:ext cx="1965960" cy="320040"/>
           </a:xfrm>
           <a:prstGeom prst="roundRect">
             <a:avLst/>
           </a:prstGeom>
           <a:solidFill>
-            <a:srgbClr val="F8FAFC"/>
+            <a:srgbClr val="FFFFFF"/>
           </a:solidFill>
           <a:ln w="19050">
             <a:solidFill>
-              <a:srgbClr val="CBD5E1"/>
+              <a:srgbClr val="14B8A6"/>
             </a:solidFill>
           </a:ln>
         </p:spPr>
@@ -4163,23 +4444,33 @@
           </a:fontRef>
         </p:style>
         <p:txBody>
-          <a:bodyPr rtlCol="0" anchor="ctr"/>
-          <a:lstStyle/>
-          <a:p>
-            <a:pPr algn="ctr"/>
-          </a:p>
-        </p:txBody>
-      </p:sp>
-      <p:sp>
-        <p:nvSpPr>
-          <p:cNvPr id="10" name="TextBox 9"/>
+          <a:bodyPr rtlCol="0" anchor="ctr" lIns="0" tIns="0" rIns="0" bIns="0"/>
+          <a:lstStyle/>
+          <a:p>
+            <a:pPr algn="ctr">
+              <a:defRPr sz="950" b="1">
+                <a:solidFill>
+                  <a:srgbClr val="0D9488"/>
+                </a:solidFill>
+                <a:latin typeface="Arial"/>
+              </a:defRPr>
+            </a:pPr>
+            <a:r>
+              <a:t>TARGET AUDIENCE</a:t>
+            </a:r>
+          </a:p>
+        </p:txBody>
+      </p:sp>
+      <p:sp>
+        <p:nvSpPr>
+          <p:cNvPr id="9" name="TextBox 8"/>
           <p:cNvSpPr txBox="1"/>
           <p:nvPr/>
         </p:nvSpPr>
         <p:spPr>
           <a:xfrm>
-            <a:off x="6446520" y="2057400"/>
-            <a:ext cx="4800600" cy="1737360"/>
+            <a:off x="960120" y="2496311"/>
+            <a:ext cx="4709160" cy="1389888"/>
           </a:xfrm>
           <a:prstGeom prst="rect">
             <a:avLst/>
@@ -4187,93 +4478,45 @@
           <a:noFill/>
         </p:spPr>
         <p:txBody>
-          <a:bodyPr wrap="square">
+          <a:bodyPr wrap="square" lIns="0" tIns="0" rIns="0" bIns="0">
             <a:spAutoFit/>
           </a:bodyPr>
           <a:lstStyle/>
           <a:p>
             <a:pPr>
-              <a:defRPr sz="1000" b="1">
-                <a:solidFill>
-                  <a:srgbClr val="0D9488"/>
+              <a:defRPr sz="1150">
+                <a:solidFill>
+                  <a:srgbClr val="1E293B"/>
                 </a:solidFill>
                 <a:latin typeface="Arial"/>
               </a:defRPr>
             </a:pPr>
             <a:r>
-              <a:t>CORE FRICTION</a:t>
-            </a:r>
-          </a:p>
-          <a:p>
-            <a:pPr>
-              <a:spcAft>
-                <a:spcPts val="300"/>
-              </a:spcAft>
-              <a:defRPr sz="1100">
-                <a:solidFill>
-                  <a:srgbClr val="1E293B"/>
-                </a:solidFill>
-                <a:latin typeface="Arial"/>
-              </a:defRPr>
-            </a:pPr>
-            <a:r>
-              <a:t>Filters block spam but do not trace attacker origins.</a:t>
-            </a:r>
-          </a:p>
-          <a:p>
-            <a:pPr>
-              <a:spcAft>
-                <a:spcPts val="300"/>
-              </a:spcAft>
-              <a:defRPr sz="1100">
-                <a:solidFill>
-                  <a:srgbClr val="1E293B"/>
-                </a:solidFill>
-                <a:latin typeface="Arial"/>
-              </a:defRPr>
-            </a:pPr>
-            <a:r>
-              <a:t>Header forensics is manual, fragmented, and performed one email at a time.</a:t>
-            </a:r>
-          </a:p>
-          <a:p>
-            <a:pPr>
-              <a:spcAft>
-                <a:spcPts val="300"/>
-              </a:spcAft>
-              <a:defRPr sz="1100">
-                <a:solidFill>
-                  <a:srgbClr val="1E293B"/>
-                </a:solidFill>
-                <a:latin typeface="Arial"/>
-              </a:defRPr>
-            </a:pPr>
-            <a:r>
-              <a:t>Zero existing open-source tools correlate detection, MTA relay origin tracing, campaign clustering, and court-admissible cryptographic evidence.</a:t>
-            </a:r>
-          </a:p>
-        </p:txBody>
-      </p:sp>
-      <p:sp>
-        <p:nvSpPr>
-          <p:cNvPr id="11" name="Rounded Rectangle 10"/>
+              <a:t>Security teams, banks, institutions and investigators, plus students and staff who face phishing every day.</a:t>
+            </a:r>
+          </a:p>
+        </p:txBody>
+      </p:sp>
+      <p:sp>
+        <p:nvSpPr>
+          <p:cNvPr id="10" name="Rounded Rectangle 9"/>
           <p:cNvSpPr/>
           <p:nvPr/>
         </p:nvSpPr>
         <p:spPr>
           <a:xfrm>
-            <a:off x="731520" y="4160520"/>
-            <a:ext cx="5166360" cy="2011680"/>
+            <a:off x="6291072" y="1874519"/>
+            <a:ext cx="5166360" cy="2103120"/>
           </a:xfrm>
           <a:prstGeom prst="roundRect">
             <a:avLst/>
           </a:prstGeom>
           <a:solidFill>
-            <a:srgbClr val="F8FAFC"/>
+            <a:srgbClr val="FFFFFF"/>
           </a:solidFill>
           <a:ln w="19050">
             <a:solidFill>
-              <a:srgbClr val="CBD5E1"/>
+              <a:srgbClr val="E2E8F0"/>
             </a:solidFill>
           </a:ln>
         </p:spPr>
@@ -4301,92 +4544,24 @@
       </p:sp>
       <p:sp>
         <p:nvSpPr>
-          <p:cNvPr id="12" name="TextBox 11"/>
-          <p:cNvSpPr txBox="1"/>
-          <p:nvPr/>
-        </p:nvSpPr>
-        <p:spPr>
-          <a:xfrm>
-            <a:off x="914400" y="4297680"/>
-            <a:ext cx="4800600" cy="1737360"/>
-          </a:xfrm>
-          <a:prstGeom prst="rect">
-            <a:avLst/>
-          </a:prstGeom>
-          <a:noFill/>
-        </p:spPr>
-        <p:txBody>
-          <a:bodyPr wrap="square">
-            <a:spAutoFit/>
-          </a:bodyPr>
-          <a:lstStyle/>
-          <a:p>
-            <a:pPr>
-              <a:defRPr sz="1000" b="1">
-                <a:solidFill>
-                  <a:srgbClr val="0D9488"/>
-                </a:solidFill>
-                <a:latin typeface="Arial"/>
-              </a:defRPr>
-            </a:pPr>
-            <a:r>
-              <a:t>CURRENT REALITY</a:t>
-            </a:r>
-          </a:p>
-          <a:p>
-            <a:pPr>
-              <a:spcAft>
-                <a:spcPts val="300"/>
-              </a:spcAft>
-              <a:defRPr sz="1100">
-                <a:solidFill>
-                  <a:srgbClr val="1E293B"/>
-                </a:solidFill>
-                <a:latin typeface="Arial"/>
-              </a:defRPr>
-            </a:pPr>
-            <a:r>
-              <a:t>Adversaries leverage generative AI for hyper-personalized social engineering and lookalike domains that cleanly bypass SPF/DKIM filters.</a:t>
-            </a:r>
-          </a:p>
-          <a:p>
-            <a:pPr>
-              <a:spcAft>
-                <a:spcPts val="300"/>
-              </a:spcAft>
-              <a:defRPr sz="1100">
-                <a:solidFill>
-                  <a:srgbClr val="1E293B"/>
-                </a:solidFill>
-                <a:latin typeface="Arial"/>
-              </a:defRPr>
-            </a:pPr>
-            <a:r>
-              <a:t>Investigators waste 20-40 minutes per incident manually inspecting Received headers, IP lookups, and hop timing.</a:t>
-            </a:r>
-          </a:p>
-        </p:txBody>
-      </p:sp>
-      <p:sp>
-        <p:nvSpPr>
-          <p:cNvPr id="13" name="Rounded Rectangle 12"/>
+          <p:cNvPr id="11" name="Rounded Rectangle 10"/>
           <p:cNvSpPr/>
           <p:nvPr/>
         </p:nvSpPr>
         <p:spPr>
           <a:xfrm>
-            <a:off x="6263640" y="4160520"/>
-            <a:ext cx="5166360" cy="2011680"/>
+            <a:off x="6519672" y="2075687"/>
+            <a:ext cx="1764792" cy="320040"/>
           </a:xfrm>
           <a:prstGeom prst="roundRect">
             <a:avLst/>
           </a:prstGeom>
           <a:solidFill>
-            <a:srgbClr val="F8FAFC"/>
+            <a:srgbClr val="FFFFFF"/>
           </a:solidFill>
           <a:ln w="19050">
             <a:solidFill>
-              <a:srgbClr val="CBD5E1"/>
+              <a:srgbClr val="14B8A6"/>
             </a:solidFill>
           </a:ln>
         </p:spPr>
@@ -4405,23 +4580,33 @@
           </a:fontRef>
         </p:style>
         <p:txBody>
-          <a:bodyPr rtlCol="0" anchor="ctr"/>
-          <a:lstStyle/>
-          <a:p>
-            <a:pPr algn="ctr"/>
-          </a:p>
-        </p:txBody>
-      </p:sp>
-      <p:sp>
-        <p:nvSpPr>
-          <p:cNvPr id="14" name="TextBox 13"/>
+          <a:bodyPr rtlCol="0" anchor="ctr" lIns="0" tIns="0" rIns="0" bIns="0"/>
+          <a:lstStyle/>
+          <a:p>
+            <a:pPr algn="ctr">
+              <a:defRPr sz="950" b="1">
+                <a:solidFill>
+                  <a:srgbClr val="0D9488"/>
+                </a:solidFill>
+                <a:latin typeface="Arial"/>
+              </a:defRPr>
+            </a:pPr>
+            <a:r>
+              <a:t>CORE FRICTION</a:t>
+            </a:r>
+          </a:p>
+        </p:txBody>
+      </p:sp>
+      <p:sp>
+        <p:nvSpPr>
+          <p:cNvPr id="12" name="TextBox 11"/>
           <p:cNvSpPr txBox="1"/>
           <p:nvPr/>
         </p:nvSpPr>
         <p:spPr>
           <a:xfrm>
-            <a:off x="6446520" y="4297680"/>
-            <a:ext cx="4800600" cy="1737360"/>
+            <a:off x="6519672" y="2496311"/>
+            <a:ext cx="4709160" cy="1389888"/>
           </a:xfrm>
           <a:prstGeom prst="rect">
             <a:avLst/>
@@ -4429,13 +4614,113 @@
           <a:noFill/>
         </p:spPr>
         <p:txBody>
-          <a:bodyPr wrap="square">
+          <a:bodyPr wrap="square" lIns="0" tIns="0" rIns="0" bIns="0">
             <a:spAutoFit/>
           </a:bodyPr>
           <a:lstStyle/>
           <a:p>
             <a:pPr>
-              <a:defRPr sz="1000" b="1">
+              <a:defRPr sz="1150">
+                <a:solidFill>
+                  <a:srgbClr val="1E293B"/>
+                </a:solidFill>
+                <a:latin typeface="Arial"/>
+              </a:defRPr>
+            </a:pPr>
+            <a:r>
+              <a:t>Filters block but do not trace. Header analysis is manual and one email at a time, and no open tool links detection, origin tracing, campaigns and court-ready evidence.</a:t>
+            </a:r>
+          </a:p>
+        </p:txBody>
+      </p:sp>
+      <p:sp>
+        <p:nvSpPr>
+          <p:cNvPr id="13" name="Rounded Rectangle 12"/>
+          <p:cNvSpPr/>
+          <p:nvPr/>
+        </p:nvSpPr>
+        <p:spPr>
+          <a:xfrm>
+            <a:off x="731520" y="4160520"/>
+            <a:ext cx="5166360" cy="2103120"/>
+          </a:xfrm>
+          <a:prstGeom prst="roundRect">
+            <a:avLst/>
+          </a:prstGeom>
+          <a:solidFill>
+            <a:srgbClr val="FFFFFF"/>
+          </a:solidFill>
+          <a:ln w="19050">
+            <a:solidFill>
+              <a:srgbClr val="E2E8F0"/>
+            </a:solidFill>
+          </a:ln>
+        </p:spPr>
+        <p:style>
+          <a:lnRef idx="1">
+            <a:schemeClr val="accent1"/>
+          </a:lnRef>
+          <a:fillRef idx="3">
+            <a:schemeClr val="accent1"/>
+          </a:fillRef>
+          <a:effectRef idx="2">
+            <a:schemeClr val="accent1"/>
+          </a:effectRef>
+          <a:fontRef idx="minor">
+            <a:schemeClr val="lt1"/>
+          </a:fontRef>
+        </p:style>
+        <p:txBody>
+          <a:bodyPr rtlCol="0" anchor="ctr"/>
+          <a:lstStyle/>
+          <a:p>
+            <a:pPr algn="ctr"/>
+          </a:p>
+        </p:txBody>
+      </p:sp>
+      <p:sp>
+        <p:nvSpPr>
+          <p:cNvPr id="14" name="Rounded Rectangle 13"/>
+          <p:cNvSpPr/>
+          <p:nvPr/>
+        </p:nvSpPr>
+        <p:spPr>
+          <a:xfrm>
+            <a:off x="960120" y="4361688"/>
+            <a:ext cx="1965960" cy="320040"/>
+          </a:xfrm>
+          <a:prstGeom prst="roundRect">
+            <a:avLst/>
+          </a:prstGeom>
+          <a:solidFill>
+            <a:srgbClr val="FFFFFF"/>
+          </a:solidFill>
+          <a:ln w="19050">
+            <a:solidFill>
+              <a:srgbClr val="14B8A6"/>
+            </a:solidFill>
+          </a:ln>
+        </p:spPr>
+        <p:style>
+          <a:lnRef idx="1">
+            <a:schemeClr val="accent1"/>
+          </a:lnRef>
+          <a:fillRef idx="3">
+            <a:schemeClr val="accent1"/>
+          </a:fillRef>
+          <a:effectRef idx="2">
+            <a:schemeClr val="accent1"/>
+          </a:effectRef>
+          <a:fontRef idx="minor">
+            <a:schemeClr val="lt1"/>
+          </a:fontRef>
+        </p:style>
+        <p:txBody>
+          <a:bodyPr rtlCol="0" anchor="ctr" lIns="0" tIns="0" rIns="0" bIns="0"/>
+          <a:lstStyle/>
+          <a:p>
+            <a:pPr algn="ctr">
+              <a:defRPr sz="950" b="1">
                 <a:solidFill>
                   <a:srgbClr val="0D9488"/>
                 </a:solidFill>
@@ -4443,55 +4728,195 @@
               </a:defRPr>
             </a:pPr>
             <a:r>
+              <a:t>CURRENT REALITY</a:t>
+            </a:r>
+          </a:p>
+        </p:txBody>
+      </p:sp>
+      <p:sp>
+        <p:nvSpPr>
+          <p:cNvPr id="15" name="TextBox 14"/>
+          <p:cNvSpPr txBox="1"/>
+          <p:nvPr/>
+        </p:nvSpPr>
+        <p:spPr>
+          <a:xfrm>
+            <a:off x="960120" y="4782312"/>
+            <a:ext cx="4709160" cy="1389888"/>
+          </a:xfrm>
+          <a:prstGeom prst="rect">
+            <a:avLst/>
+          </a:prstGeom>
+          <a:noFill/>
+        </p:spPr>
+        <p:txBody>
+          <a:bodyPr wrap="square" lIns="0" tIns="0" rIns="0" bIns="0">
+            <a:spAutoFit/>
+          </a:bodyPr>
+          <a:lstStyle/>
+          <a:p>
+            <a:pPr>
+              <a:defRPr sz="1150">
+                <a:solidFill>
+                  <a:srgbClr val="1E293B"/>
+                </a:solidFill>
+                <a:latin typeface="Arial"/>
+              </a:defRPr>
+            </a:pPr>
+            <a:r>
+              <a:t>Attackers use AI-written text and lookalike domains to evade filters; investigators trace relay paths by hand.</a:t>
+            </a:r>
+          </a:p>
+        </p:txBody>
+      </p:sp>
+      <p:sp>
+        <p:nvSpPr>
+          <p:cNvPr id="16" name="Rounded Rectangle 15"/>
+          <p:cNvSpPr/>
+          <p:nvPr/>
+        </p:nvSpPr>
+        <p:spPr>
+          <a:xfrm>
+            <a:off x="6291072" y="4160520"/>
+            <a:ext cx="5166360" cy="2103120"/>
+          </a:xfrm>
+          <a:prstGeom prst="roundRect">
+            <a:avLst/>
+          </a:prstGeom>
+          <a:solidFill>
+            <a:srgbClr val="FFFFFF"/>
+          </a:solidFill>
+          <a:ln w="19050">
+            <a:solidFill>
+              <a:srgbClr val="E2E8F0"/>
+            </a:solidFill>
+          </a:ln>
+        </p:spPr>
+        <p:style>
+          <a:lnRef idx="1">
+            <a:schemeClr val="accent1"/>
+          </a:lnRef>
+          <a:fillRef idx="3">
+            <a:schemeClr val="accent1"/>
+          </a:fillRef>
+          <a:effectRef idx="2">
+            <a:schemeClr val="accent1"/>
+          </a:effectRef>
+          <a:fontRef idx="minor">
+            <a:schemeClr val="lt1"/>
+          </a:fontRef>
+        </p:style>
+        <p:txBody>
+          <a:bodyPr rtlCol="0" anchor="ctr"/>
+          <a:lstStyle/>
+          <a:p>
+            <a:pPr algn="ctr"/>
+          </a:p>
+        </p:txBody>
+      </p:sp>
+      <p:sp>
+        <p:nvSpPr>
+          <p:cNvPr id="17" name="Rounded Rectangle 16"/>
+          <p:cNvSpPr/>
+          <p:nvPr/>
+        </p:nvSpPr>
+        <p:spPr>
+          <a:xfrm>
+            <a:off x="6519672" y="4361688"/>
+            <a:ext cx="2167128" cy="320040"/>
+          </a:xfrm>
+          <a:prstGeom prst="roundRect">
+            <a:avLst/>
+          </a:prstGeom>
+          <a:solidFill>
+            <a:srgbClr val="FFFFFF"/>
+          </a:solidFill>
+          <a:ln w="19050">
+            <a:solidFill>
+              <a:srgbClr val="14B8A6"/>
+            </a:solidFill>
+          </a:ln>
+        </p:spPr>
+        <p:style>
+          <a:lnRef idx="1">
+            <a:schemeClr val="accent1"/>
+          </a:lnRef>
+          <a:fillRef idx="3">
+            <a:schemeClr val="accent1"/>
+          </a:fillRef>
+          <a:effectRef idx="2">
+            <a:schemeClr val="accent1"/>
+          </a:effectRef>
+          <a:fontRef idx="minor">
+            <a:schemeClr val="lt1"/>
+          </a:fontRef>
+        </p:style>
+        <p:txBody>
+          <a:bodyPr rtlCol="0" anchor="ctr" lIns="0" tIns="0" rIns="0" bIns="0"/>
+          <a:lstStyle/>
+          <a:p>
+            <a:pPr algn="ctr">
+              <a:defRPr sz="950" b="1">
+                <a:solidFill>
+                  <a:srgbClr val="0D9488"/>
+                </a:solidFill>
+                <a:latin typeface="Arial"/>
+              </a:defRPr>
+            </a:pPr>
+            <a:r>
               <a:t>METRIC / EVIDENCE</a:t>
             </a:r>
           </a:p>
-          <a:p>
-            <a:pPr>
-              <a:spcAft>
-                <a:spcPts val="300"/>
-              </a:spcAft>
-              <a:defRPr sz="1100">
+        </p:txBody>
+      </p:sp>
+      <p:sp>
+        <p:nvSpPr>
+          <p:cNvPr id="18" name="TextBox 17"/>
+          <p:cNvSpPr txBox="1"/>
+          <p:nvPr/>
+        </p:nvSpPr>
+        <p:spPr>
+          <a:xfrm>
+            <a:off x="6519672" y="4782312"/>
+            <a:ext cx="4709160" cy="1389888"/>
+          </a:xfrm>
+          <a:prstGeom prst="rect">
+            <a:avLst/>
+          </a:prstGeom>
+          <a:noFill/>
+        </p:spPr>
+        <p:txBody>
+          <a:bodyPr wrap="square" lIns="0" tIns="0" rIns="0" bIns="0">
+            <a:spAutoFit/>
+          </a:bodyPr>
+          <a:lstStyle/>
+          <a:p>
+            <a:r>
+              <a:rPr sz="1150">
                 <a:solidFill>
                   <a:srgbClr val="1E293B"/>
                 </a:solidFill>
                 <a:latin typeface="Arial"/>
-              </a:defRPr>
-            </a:pPr>
-            <a:r>
-              <a:t>FBI IC3 2025: Business Email Compromise (BEC) losses hit $3.05 Billion.</a:t>
-            </a:r>
-          </a:p>
-          <a:p>
-            <a:pPr>
-              <a:spcAft>
-                <a:spcPts val="300"/>
-              </a:spcAft>
-              <a:defRPr sz="1100">
+              </a:rPr>
+              <a:t>FBI IC3 2025: business email compromise losses hit </a:t>
+            </a:r>
+            <a:r>
+              <a:rPr sz="1150" b="1">
+                <a:solidFill>
+                  <a:srgbClr val="EA580C"/>
+                </a:solidFill>
+                <a:latin typeface="Arial"/>
+              </a:rPr>
+              <a:t>$3.05B</a:t>
+            </a:r>
+            <a:r>
+              <a:rPr sz="1150">
                 <a:solidFill>
                   <a:srgbClr val="1E293B"/>
                 </a:solidFill>
                 <a:latin typeface="Arial"/>
-              </a:defRPr>
-            </a:pPr>
-            <a:r>
-              <a:t>Phishing remains the #1 most reported cybercrime with 191,000+ complaints.</a:t>
-            </a:r>
-          </a:p>
-          <a:p>
-            <a:pPr>
-              <a:spcAft>
-                <a:spcPts val="300"/>
-              </a:spcAft>
-              <a:defRPr sz="1100">
-                <a:solidFill>
-                  <a:srgbClr val="1E293B"/>
-                </a:solidFill>
-                <a:latin typeface="Arial"/>
-              </a:defRPr>
-            </a:pPr>
-            <a:r>
-              <a:t>Manual triage backlogs leave 80% of reported phishing alerts uninvestigated.</a:t>
+              </a:rPr>
+              <a:t>; phishing was the most-reported crime (191K+ complaints).</a:t>
             </a:r>
           </a:p>
         </p:txBody>
@@ -4523,7 +4948,7 @@
         <p:spPr>
           <a:xfrm>
             <a:off x="731520" y="365760"/>
-            <a:ext cx="3657600" cy="640080"/>
+            <a:ext cx="3200400" cy="731520"/>
           </a:xfrm>
           <a:prstGeom prst="rect">
             <a:avLst/>
@@ -4531,21 +4956,34 @@
           <a:noFill/>
         </p:spPr>
         <p:txBody>
-          <a:bodyPr wrap="square">
+          <a:bodyPr wrap="square" lIns="0" tIns="0" rIns="0" bIns="0">
             <a:spAutoFit/>
           </a:bodyPr>
           <a:lstStyle/>
           <a:p>
             <a:pPr>
-              <a:defRPr sz="1300" b="1">
-                <a:solidFill>
-                  <a:srgbClr val="B4141E"/>
+              <a:defRPr sz="1400" b="1">
+                <a:solidFill>
+                  <a:srgbClr val="BE182B"/>
+                </a:solidFill>
+                <a:latin typeface="Arial Black"/>
+              </a:defRPr>
+            </a:pPr>
+            <a:r>
+              <a:t>RAMAIAH</a:t>
+            </a:r>
+          </a:p>
+          <a:p>
+            <a:pPr>
+              <a:defRPr sz="1100">
+                <a:solidFill>
+                  <a:srgbClr val="0F172A"/>
                 </a:solidFill>
                 <a:latin typeface="Arial"/>
               </a:defRPr>
             </a:pPr>
             <a:r>
-              <a:t>RAMAIAH Institute of Technology</a:t>
+              <a:t>Institute of Technology</a:t>
             </a:r>
           </a:p>
         </p:txBody>
@@ -4559,7 +4997,7 @@
         <p:spPr>
           <a:xfrm>
             <a:off x="5120640" y="274320"/>
-            <a:ext cx="2011680" cy="731520"/>
+            <a:ext cx="1950415" cy="822960"/>
           </a:xfrm>
           <a:prstGeom prst="rect">
             <a:avLst/>
@@ -4567,21 +5005,29 @@
           <a:noFill/>
         </p:spPr>
         <p:txBody>
-          <a:bodyPr wrap="none">
+          <a:bodyPr wrap="none" lIns="0" tIns="0" rIns="0" bIns="0">
             <a:spAutoFit/>
           </a:bodyPr>
           <a:lstStyle/>
           <a:p>
-            <a:pPr algn="ctr">
-              <a:defRPr sz="3200" b="1">
-                <a:solidFill>
-                  <a:srgbClr val="EA580C"/>
+            <a:pPr algn="ctr"/>
+            <a:r>
+              <a:rPr sz="3600" b="1">
+                <a:solidFill>
+                  <a:srgbClr val="E73C27"/>
                 </a:solidFill>
                 <a:latin typeface="Arial Black"/>
-              </a:defRPr>
-            </a:pPr>
-            <a:r>
-              <a:t>MLH</a:t>
+              </a:rPr>
+              <a:t>ML</a:t>
+            </a:r>
+            <a:r>
+              <a:rPr sz="3600" b="1">
+                <a:solidFill>
+                  <a:srgbClr val="F59E0B"/>
+                </a:solidFill>
+                <a:latin typeface="Arial Black"/>
+              </a:rPr>
+              <a:t>H</a:t>
             </a:r>
           </a:p>
         </p:txBody>
@@ -4594,8 +5040,8 @@
         </p:nvSpPr>
         <p:spPr>
           <a:xfrm>
-            <a:off x="8412480" y="365760"/>
-            <a:ext cx="3017520" cy="640080"/>
+            <a:off x="8686800" y="365760"/>
+            <a:ext cx="2743200" cy="731520"/>
           </a:xfrm>
           <a:prstGeom prst="rect">
             <a:avLst/>
@@ -4603,21 +5049,34 @@
           <a:noFill/>
         </p:spPr>
         <p:txBody>
-          <a:bodyPr wrap="none">
+          <a:bodyPr wrap="square" lIns="0" tIns="0" rIns="0" bIns="0">
             <a:spAutoFit/>
           </a:bodyPr>
           <a:lstStyle/>
           <a:p>
             <a:pPr algn="r">
-              <a:defRPr sz="1100" b="1">
+              <a:defRPr sz="1200" b="1">
                 <a:solidFill>
                   <a:srgbClr val="0284C7"/>
                 </a:solidFill>
+                <a:latin typeface="Arial Black"/>
+              </a:defRPr>
+            </a:pPr>
+            <a:r>
+              <a:t>IEEE</a:t>
+            </a:r>
+          </a:p>
+          <a:p>
+            <a:pPr algn="r">
+              <a:defRPr sz="1000" b="1">
+                <a:solidFill>
+                  <a:srgbClr val="0F172A"/>
+                </a:solidFill>
                 <a:latin typeface="Arial"/>
               </a:defRPr>
             </a:pPr>
             <a:r>
-              <a:t>IEEE Computational Intelligence Society</a:t>
+              <a:t>Computational Intelligence Society</a:t>
             </a:r>
           </a:p>
         </p:txBody>
@@ -4630,8 +5089,8 @@
         </p:nvSpPr>
         <p:spPr>
           <a:xfrm>
-            <a:off x="731520" y="1051560"/>
-            <a:ext cx="10698480" cy="731520"/>
+            <a:off x="731520" y="1097280"/>
+            <a:ext cx="10728655" cy="685800"/>
           </a:xfrm>
           <a:prstGeom prst="rect">
             <a:avLst/>
@@ -4639,13 +5098,13 @@
           <a:noFill/>
         </p:spPr>
         <p:txBody>
-          <a:bodyPr wrap="none">
+          <a:bodyPr wrap="none" lIns="0" tIns="0" rIns="0" bIns="0">
             <a:spAutoFit/>
           </a:bodyPr>
           <a:lstStyle/>
           <a:p>
             <a:pPr>
-              <a:defRPr sz="2800" b="1">
+              <a:defRPr sz="3200" b="1">
                 <a:solidFill>
                   <a:srgbClr val="0F172A"/>
                 </a:solidFill>
@@ -4666,8 +5125,8 @@
         </p:nvSpPr>
         <p:spPr>
           <a:xfrm>
-            <a:off x="731520" y="6400800"/>
-            <a:ext cx="10698480" cy="320040"/>
+            <a:off x="731520" y="6446520"/>
+            <a:ext cx="10728655" cy="274320"/>
           </a:xfrm>
           <a:prstGeom prst="rect">
             <a:avLst/>
@@ -4675,15 +5134,15 @@
           <a:noFill/>
         </p:spPr>
         <p:txBody>
-          <a:bodyPr wrap="none">
+          <a:bodyPr wrap="none" lIns="0" tIns="0" rIns="0" bIns="0">
             <a:spAutoFit/>
           </a:bodyPr>
           <a:lstStyle/>
           <a:p>
             <a:pPr algn="ctr">
-              <a:defRPr sz="1000">
-                <a:solidFill>
-                  <a:srgbClr val="64748B"/>
+              <a:defRPr sz="1050">
+                <a:solidFill>
+                  <a:srgbClr val="475569"/>
                 </a:solidFill>
                 <a:latin typeface="Arial"/>
               </a:defRPr>
@@ -4702,18 +5161,18 @@
         </p:nvSpPr>
         <p:spPr>
           <a:xfrm>
-            <a:off x="731520" y="1920240"/>
-            <a:ext cx="4114800" cy="4251960"/>
+            <a:off x="731520" y="1874519"/>
+            <a:ext cx="4206240" cy="4389120"/>
           </a:xfrm>
           <a:prstGeom prst="roundRect">
             <a:avLst/>
           </a:prstGeom>
           <a:solidFill>
-            <a:srgbClr val="F8FAFC"/>
+            <a:srgbClr val="FFFFFF"/>
           </a:solidFill>
           <a:ln w="19050">
             <a:solidFill>
-              <a:srgbClr val="CBD5E1"/>
+              <a:srgbClr val="E2E8F0"/>
             </a:solidFill>
           </a:ln>
         </p:spPr>
@@ -4741,153 +5200,24 @@
       </p:sp>
       <p:sp>
         <p:nvSpPr>
-          <p:cNvPr id="8" name="TextBox 7"/>
-          <p:cNvSpPr txBox="1"/>
-          <p:nvPr/>
-        </p:nvSpPr>
-        <p:spPr>
-          <a:xfrm>
-            <a:off x="914400" y="2057400"/>
-            <a:ext cx="3749040" cy="3977640"/>
-          </a:xfrm>
-          <a:prstGeom prst="rect">
-            <a:avLst/>
-          </a:prstGeom>
-          <a:noFill/>
-        </p:spPr>
-        <p:txBody>
-          <a:bodyPr wrap="square">
-            <a:spAutoFit/>
-          </a:bodyPr>
-          <a:lstStyle/>
-          <a:p>
-            <a:pPr>
-              <a:defRPr sz="1000" b="1">
-                <a:solidFill>
-                  <a:srgbClr val="0D9488"/>
-                </a:solidFill>
-                <a:latin typeface="Arial"/>
-              </a:defRPr>
-            </a:pPr>
-            <a:r>
-              <a:t>CORE CONCEPT</a:t>
-            </a:r>
-          </a:p>
-          <a:p>
-            <a:pPr>
-              <a:spcAft>
-                <a:spcPts val="300"/>
-              </a:spcAft>
-              <a:defRPr sz="1100">
-                <a:solidFill>
-                  <a:srgbClr val="1E293B"/>
-                </a:solidFill>
-                <a:latin typeface="Arial"/>
-              </a:defRPr>
-            </a:pPr>
-            <a:r>
-              <a:t>An open-source, full-stack intelligence platform that detects phishing and BEC, traces probable geographic origin with confidence scores, and links attacks into campaigns with hashed evidence.</a:t>
-            </a:r>
-          </a:p>
-          <a:p>
-            <a:pPr>
-              <a:spcAft>
-                <a:spcPts val="300"/>
-              </a:spcAft>
-              <a:defRPr sz="1100">
-                <a:solidFill>
-                  <a:srgbClr val="1E293B"/>
-                </a:solidFill>
-                <a:latin typeface="Arial"/>
-              </a:defRPr>
-            </a:pPr>
-          </a:p>
-          <a:p>
-            <a:pPr>
-              <a:spcAft>
-                <a:spcPts val="300"/>
-              </a:spcAft>
-              <a:defRPr sz="1100">
-                <a:solidFill>
-                  <a:srgbClr val="1E293B"/>
-                </a:solidFill>
-                <a:latin typeface="Arial"/>
-              </a:defRPr>
-            </a:pPr>
-            <a:r>
-              <a:t>KEY CAPABILITIES:</a:t>
-            </a:r>
-          </a:p>
-          <a:p>
-            <a:pPr>
-              <a:spcAft>
-                <a:spcPts val="300"/>
-              </a:spcAft>
-              <a:defRPr sz="1100">
-                <a:solidFill>
-                  <a:srgbClr val="1E293B"/>
-                </a:solidFill>
-                <a:latin typeface="Arial"/>
-              </a:defRPr>
-            </a:pPr>
-            <a:r>
-              <a:t>• Feature 01: Explainable Threat Detection (SPF/DKIM/DMARC auth + NLP heuristics)</a:t>
-            </a:r>
-          </a:p>
-          <a:p>
-            <a:pPr>
-              <a:spcAft>
-                <a:spcPts val="300"/>
-              </a:spcAft>
-              <a:defRPr sz="1100">
-                <a:solidFill>
-                  <a:srgbClr val="1E293B"/>
-                </a:solidFill>
-                <a:latin typeface="Arial"/>
-              </a:defRPr>
-            </a:pPr>
-            <a:r>
-              <a:t>• Feature 02: Origin Relay Tracing + Geo-Confidence Leaflet Map</a:t>
-            </a:r>
-          </a:p>
-          <a:p>
-            <a:pPr>
-              <a:spcAft>
-                <a:spcPts val="300"/>
-              </a:spcAft>
-              <a:defRPr sz="1100">
-                <a:solidFill>
-                  <a:srgbClr val="1E293B"/>
-                </a:solidFill>
-                <a:latin typeface="Arial"/>
-              </a:defRPr>
-            </a:pPr>
-            <a:r>
-              <a:t>• Feature 03: Dynamic Campaign Clustering + Cryptographic SHA-256 PDF Evidence</a:t>
-            </a:r>
-          </a:p>
-        </p:txBody>
-      </p:sp>
-      <p:sp>
-        <p:nvSpPr>
-          <p:cNvPr id="9" name="Rounded Rectangle 8"/>
+          <p:cNvPr id="8" name="Rounded Rectangle 7"/>
           <p:cNvSpPr/>
           <p:nvPr/>
         </p:nvSpPr>
         <p:spPr>
           <a:xfrm>
-            <a:off x="5120640" y="1920240"/>
-            <a:ext cx="2011680" cy="4251960"/>
+            <a:off x="960120" y="2084831"/>
+            <a:ext cx="1645920" cy="320040"/>
           </a:xfrm>
           <a:prstGeom prst="roundRect">
             <a:avLst/>
           </a:prstGeom>
           <a:solidFill>
-            <a:srgbClr val="F8FAFC"/>
+            <a:srgbClr val="FFFFFF"/>
           </a:solidFill>
           <a:ln w="19050">
             <a:solidFill>
-              <a:srgbClr val="CBD5E1"/>
+              <a:srgbClr val="14B8A6"/>
             </a:solidFill>
           </a:ln>
         </p:spPr>
@@ -4906,23 +5236,33 @@
           </a:fontRef>
         </p:style>
         <p:txBody>
-          <a:bodyPr rtlCol="0" anchor="ctr"/>
-          <a:lstStyle/>
-          <a:p>
-            <a:pPr algn="ctr"/>
-          </a:p>
-        </p:txBody>
-      </p:sp>
-      <p:sp>
-        <p:nvSpPr>
-          <p:cNvPr id="10" name="TextBox 9"/>
+          <a:bodyPr rtlCol="0" anchor="ctr" lIns="0" tIns="0" rIns="0" bIns="0"/>
+          <a:lstStyle/>
+          <a:p>
+            <a:pPr algn="ctr">
+              <a:defRPr sz="950" b="1">
+                <a:solidFill>
+                  <a:srgbClr val="0D9488"/>
+                </a:solidFill>
+                <a:latin typeface="Arial"/>
+              </a:defRPr>
+            </a:pPr>
+            <a:r>
+              <a:t>CORE CONCEPT</a:t>
+            </a:r>
+          </a:p>
+        </p:txBody>
+      </p:sp>
+      <p:sp>
+        <p:nvSpPr>
+          <p:cNvPr id="9" name="TextBox 8"/>
           <p:cNvSpPr txBox="1"/>
           <p:nvPr/>
         </p:nvSpPr>
         <p:spPr>
           <a:xfrm>
-            <a:off x="5303520" y="2057400"/>
-            <a:ext cx="1645920" cy="3977640"/>
+            <a:off x="960120" y="2514600"/>
+            <a:ext cx="3749039" cy="1463040"/>
           </a:xfrm>
           <a:prstGeom prst="rect">
             <a:avLst/>
@@ -4930,140 +5270,46 @@
           <a:noFill/>
         </p:spPr>
         <p:txBody>
-          <a:bodyPr wrap="square">
+          <a:bodyPr wrap="square" lIns="0" tIns="0" rIns="0" bIns="0">
             <a:spAutoFit/>
           </a:bodyPr>
           <a:lstStyle/>
           <a:p>
             <a:pPr>
-              <a:defRPr sz="1000" b="1">
-                <a:solidFill>
-                  <a:srgbClr val="0D9488"/>
+              <a:defRPr sz="1100">
+                <a:solidFill>
+                  <a:srgbClr val="1E293B"/>
                 </a:solidFill>
                 <a:latin typeface="Arial"/>
               </a:defRPr>
             </a:pPr>
             <a:r>
-              <a:t>USER INPUT</a:t>
-            </a:r>
-          </a:p>
-          <a:p>
-            <a:pPr>
-              <a:spcAft>
-                <a:spcPts val="300"/>
-              </a:spcAft>
-              <a:defRPr sz="1100">
-                <a:solidFill>
-                  <a:srgbClr val="1E293B"/>
-                </a:solidFill>
-                <a:latin typeface="Arial"/>
-              </a:defRPr>
-            </a:pPr>
-            <a:r>
-              <a:t>• .eml email files</a:t>
-            </a:r>
-          </a:p>
-          <a:p>
-            <a:pPr>
-              <a:spcAft>
-                <a:spcPts val="300"/>
-              </a:spcAft>
-              <a:defRPr sz="1100">
-                <a:solidFill>
-                  <a:srgbClr val="1E293B"/>
-                </a:solidFill>
-                <a:latin typeface="Arial"/>
-              </a:defRPr>
-            </a:pPr>
-            <a:r>
-              <a:t>• Raw RFC 822 headers</a:t>
-            </a:r>
-          </a:p>
-          <a:p>
-            <a:pPr>
-              <a:spcAft>
-                <a:spcPts val="300"/>
-              </a:spcAft>
-              <a:defRPr sz="1100">
-                <a:solidFill>
-                  <a:srgbClr val="1E293B"/>
-                </a:solidFill>
-                <a:latin typeface="Arial"/>
-              </a:defRPr>
-            </a:pPr>
-            <a:r>
-              <a:t>• Plaintext &amp; HTML body</a:t>
-            </a:r>
-          </a:p>
-          <a:p>
-            <a:pPr>
-              <a:spcAft>
-                <a:spcPts val="300"/>
-              </a:spcAft>
-              <a:defRPr sz="1100">
-                <a:solidFill>
-                  <a:srgbClr val="1E293B"/>
-                </a:solidFill>
-                <a:latin typeface="Arial"/>
-              </a:defRPr>
-            </a:pPr>
-            <a:r>
-              <a:t>• Hyperlinks &amp; URLs</a:t>
-            </a:r>
-          </a:p>
-          <a:p>
-            <a:pPr>
-              <a:spcAft>
-                <a:spcPts val="300"/>
-              </a:spcAft>
-              <a:defRPr sz="1100">
-                <a:solidFill>
-                  <a:srgbClr val="1E293B"/>
-                </a:solidFill>
-                <a:latin typeface="Arial"/>
-              </a:defRPr>
-            </a:pPr>
-            <a:r>
-              <a:t>• Attachments</a:t>
-            </a:r>
-          </a:p>
-          <a:p>
-            <a:pPr>
-              <a:spcAft>
-                <a:spcPts val="300"/>
-              </a:spcAft>
-              <a:defRPr sz="1100">
-                <a:solidFill>
-                  <a:srgbClr val="1E293B"/>
-                </a:solidFill>
-                <a:latin typeface="Arial"/>
-              </a:defRPr>
-            </a:pPr>
-            <a:r>
-              <a:t>• Direct Gmail API sync</a:t>
-            </a:r>
-          </a:p>
-        </p:txBody>
-      </p:sp>
-      <p:sp>
-        <p:nvSpPr>
-          <p:cNvPr id="11" name="Right Arrow 10"/>
+              <a:t>An open-source platform that detects phishing and business email compromise (BEC), traces probable origin with confidence scores, and links attacks into campaigns with hashed evidence.</a:t>
+            </a:r>
+          </a:p>
+        </p:txBody>
+      </p:sp>
+      <p:sp>
+        <p:nvSpPr>
+          <p:cNvPr id="10" name="Rounded Rectangle 9"/>
           <p:cNvSpPr/>
           <p:nvPr/>
         </p:nvSpPr>
         <p:spPr>
           <a:xfrm>
-            <a:off x="7223760" y="3931920"/>
-            <a:ext cx="228600" cy="228600"/>
-          </a:xfrm>
-          <a:prstGeom prst="rightArrow">
+            <a:off x="960120" y="4160520"/>
+            <a:ext cx="1463040" cy="320040"/>
+          </a:xfrm>
+          <a:prstGeom prst="roundRect">
             <a:avLst/>
           </a:prstGeom>
           <a:solidFill>
-            <a:srgbClr val="0D9488"/>
+            <a:srgbClr val="FFFFFF"/>
           </a:solidFill>
-          <a:ln>
-            <a:noFill/>
+          <a:ln w="19050">
+            <a:solidFill>
+              <a:srgbClr val="14B8A6"/>
+            </a:solidFill>
           </a:ln>
         </p:spPr>
         <p:style>
@@ -5081,10 +5327,118 @@
           </a:fontRef>
         </p:style>
         <p:txBody>
-          <a:bodyPr rtlCol="0" anchor="ctr"/>
-          <a:lstStyle/>
-          <a:p>
-            <a:pPr algn="ctr"/>
+          <a:bodyPr rtlCol="0" anchor="ctr" lIns="0" tIns="0" rIns="0" bIns="0"/>
+          <a:lstStyle/>
+          <a:p>
+            <a:pPr algn="ctr">
+              <a:defRPr sz="950" b="1">
+                <a:solidFill>
+                  <a:srgbClr val="0D9488"/>
+                </a:solidFill>
+                <a:latin typeface="Arial"/>
+              </a:defRPr>
+            </a:pPr>
+            <a:r>
+              <a:t>KEY FEATURES</a:t>
+            </a:r>
+          </a:p>
+        </p:txBody>
+      </p:sp>
+      <p:sp>
+        <p:nvSpPr>
+          <p:cNvPr id="11" name="TextBox 10"/>
+          <p:cNvSpPr txBox="1"/>
+          <p:nvPr/>
+        </p:nvSpPr>
+        <p:spPr>
+          <a:xfrm>
+            <a:off x="960120" y="4617720"/>
+            <a:ext cx="3749039" cy="1463040"/>
+          </a:xfrm>
+          <a:prstGeom prst="rect">
+            <a:avLst/>
+          </a:prstGeom>
+          <a:noFill/>
+        </p:spPr>
+        <p:txBody>
+          <a:bodyPr wrap="square" lIns="0" tIns="0" rIns="0" bIns="0">
+            <a:spAutoFit/>
+          </a:bodyPr>
+          <a:lstStyle/>
+          <a:p>
+            <a:pPr>
+              <a:spcAft>
+                <a:spcPts val="800"/>
+              </a:spcAft>
+            </a:pPr>
+            <a:r>
+              <a:rPr sz="1100" b="1">
+                <a:solidFill>
+                  <a:srgbClr val="EA580C"/>
+                </a:solidFill>
+                <a:latin typeface="Arial"/>
+              </a:rPr>
+              <a:t>Feature 01: </a:t>
+            </a:r>
+            <a:r>
+              <a:rPr sz="1100">
+                <a:solidFill>
+                  <a:srgbClr val="1E293B"/>
+                </a:solidFill>
+                <a:latin typeface="Arial"/>
+              </a:rPr>
+              <a:t>explainable threat detection</a:t>
+            </a:r>
+          </a:p>
+          <a:p>
+            <a:pPr>
+              <a:spcAft>
+                <a:spcPts val="800"/>
+              </a:spcAft>
+            </a:pPr>
+            <a:r>
+              <a:rPr sz="1100" b="1">
+                <a:solidFill>
+                  <a:srgbClr val="EA580C"/>
+                </a:solidFill>
+                <a:latin typeface="Arial"/>
+              </a:rPr>
+              <a:t>Feature 02: </a:t>
+            </a:r>
+            <a:r>
+              <a:rPr sz="1100">
+                <a:solidFill>
+                  <a:srgbClr val="1E293B"/>
+                </a:solidFill>
+                <a:latin typeface="Arial"/>
+              </a:rPr>
+              <a:t>origin tracing + geo-confidence</a:t>
+            </a:r>
+          </a:p>
+          <a:p>
+            <a:pPr>
+              <a:spcAft>
+                <a:spcPts val="800"/>
+              </a:spcAft>
+            </a:pPr>
+            <a:r>
+              <a:rPr sz="1100" b="1">
+                <a:solidFill>
+                  <a:srgbClr val="EA580C"/>
+                </a:solidFill>
+                <a:latin typeface="Arial"/>
+              </a:rPr>
+              <a:t>Feature 03: </a:t>
+            </a:r>
+            <a:r>
+              <a:rPr sz="1100">
+                <a:solidFill>
+                  <a:srgbClr val="1E293B"/>
+                </a:solidFill>
+                <a:latin typeface="Arial"/>
+              </a:rPr>
+              <a:t>campaign graph + hashed evidence</a:t>
+            </a:r>
           </a:p>
         </p:txBody>
       </p:sp>
@@ -5096,18 +5450,18 @@
         </p:nvSpPr>
         <p:spPr>
           <a:xfrm>
-            <a:off x="7543800" y="1920240"/>
-            <a:ext cx="2011680" cy="4251960"/>
+            <a:off x="5212080" y="1874519"/>
+            <a:ext cx="1874519" cy="4389120"/>
           </a:xfrm>
           <a:prstGeom prst="roundRect">
             <a:avLst/>
           </a:prstGeom>
           <a:solidFill>
-            <a:srgbClr val="F8FAFC"/>
+            <a:srgbClr val="FFFFFF"/>
           </a:solidFill>
           <a:ln w="19050">
             <a:solidFill>
-              <a:srgbClr val="CBD5E1"/>
+              <a:srgbClr val="E2E8F0"/>
             </a:solidFill>
           </a:ln>
         </p:spPr>
@@ -5141,8 +5495,8 @@
         </p:nvSpPr>
         <p:spPr>
           <a:xfrm>
-            <a:off x="7726680" y="2057400"/>
-            <a:ext cx="1645920" cy="3977640"/>
+            <a:off x="5349240" y="2926080"/>
+            <a:ext cx="1600199" cy="2743200"/>
           </a:xfrm>
           <a:prstGeom prst="rect">
             <a:avLst/>
@@ -5155,112 +5509,44 @@
           </a:bodyPr>
           <a:lstStyle/>
           <a:p>
-            <a:pPr>
-              <a:defRPr sz="1000" b="1">
-                <a:solidFill>
-                  <a:srgbClr val="0D9488"/>
+            <a:pPr algn="ctr">
+              <a:spcAft>
+                <a:spcPts val="1400"/>
+              </a:spcAft>
+              <a:defRPr sz="1200" b="1">
+                <a:solidFill>
+                  <a:srgbClr val="0F172A"/>
+                </a:solidFill>
+                <a:latin typeface="Arial Black"/>
+              </a:defRPr>
+            </a:pPr>
+            <a:r>
+              <a:t>USER INPUT</a:t>
+            </a:r>
+          </a:p>
+          <a:p>
+            <a:pPr algn="ctr">
+              <a:defRPr sz="1100">
+                <a:solidFill>
+                  <a:srgbClr val="1E293B"/>
                 </a:solidFill>
                 <a:latin typeface="Arial"/>
               </a:defRPr>
             </a:pPr>
             <a:r>
-              <a:t>PROCESSING ENGINE</a:t>
-            </a:r>
-          </a:p>
-          <a:p>
-            <a:pPr>
-              <a:spcAft>
-                <a:spcPts val="300"/>
-              </a:spcAft>
-              <a:defRPr sz="1100">
-                <a:solidFill>
-                  <a:srgbClr val="1E293B"/>
-                </a:solidFill>
-                <a:latin typeface="Arial"/>
-              </a:defRPr>
-            </a:pPr>
-            <a:r>
-              <a:t>• Deep header parser</a:t>
-            </a:r>
-          </a:p>
-          <a:p>
-            <a:pPr>
-              <a:spcAft>
-                <a:spcPts val="300"/>
-              </a:spcAft>
-              <a:defRPr sz="1100">
-                <a:solidFill>
-                  <a:srgbClr val="1E293B"/>
-                </a:solidFill>
-                <a:latin typeface="Arial"/>
-              </a:defRPr>
-            </a:pPr>
-            <a:r>
-              <a:t>• SPF/DKIM/DMARC checks</a:t>
-            </a:r>
-          </a:p>
-          <a:p>
-            <a:pPr>
-              <a:spcAft>
-                <a:spcPts val="300"/>
-              </a:spcAft>
-              <a:defRPr sz="1100">
-                <a:solidFill>
-                  <a:srgbClr val="1E293B"/>
-                </a:solidFill>
-                <a:latin typeface="Arial"/>
-              </a:defRPr>
-            </a:pPr>
-            <a:r>
-              <a:t>• Hop latency calculation</a:t>
-            </a:r>
-          </a:p>
-          <a:p>
-            <a:pPr>
-              <a:spcAft>
-                <a:spcPts val="300"/>
-              </a:spcAft>
-              <a:defRPr sz="1100">
-                <a:solidFill>
-                  <a:srgbClr val="1E293B"/>
-                </a:solidFill>
-                <a:latin typeface="Arial"/>
-              </a:defRPr>
-            </a:pPr>
-            <a:r>
-              <a:t>• NVIDIA NIM Cloud AI</a:t>
-            </a:r>
-          </a:p>
-          <a:p>
-            <a:pPr>
-              <a:spcAft>
-                <a:spcPts val="300"/>
-              </a:spcAft>
-              <a:defRPr sz="1100">
-                <a:solidFill>
-                  <a:srgbClr val="1E293B"/>
-                </a:solidFill>
-                <a:latin typeface="Arial"/>
-              </a:defRPr>
-            </a:pPr>
-            <a:r>
-              <a:t>• 5-LLM Consensus</a:t>
-            </a:r>
-          </a:p>
-          <a:p>
-            <a:pPr>
-              <a:spcAft>
-                <a:spcPts val="300"/>
-              </a:spcAft>
-              <a:defRPr sz="1100">
-                <a:solidFill>
-                  <a:srgbClr val="1E293B"/>
-                </a:solidFill>
-                <a:latin typeface="Arial"/>
-              </a:defRPr>
-            </a:pPr>
-            <a:r>
-              <a:t>• Campaign similarity graph</a:t>
+              <a:t>.eml files,</a:t>
+            </a:r>
+            <a:br/>
+            <a:r>
+              <a:t>headers, body,</a:t>
+            </a:r>
+            <a:br/>
+            <a:r>
+              <a:t>attachments and</a:t>
+            </a:r>
+            <a:br/>
+            <a:r>
+              <a:t>URLs</a:t>
             </a:r>
           </a:p>
         </p:txBody>
@@ -5273,14 +5559,14 @@
         </p:nvSpPr>
         <p:spPr>
           <a:xfrm>
-            <a:off x="9646920" y="3931920"/>
-            <a:ext cx="228600" cy="228600"/>
+            <a:off x="7141463" y="3931920"/>
+            <a:ext cx="210312" cy="182880"/>
           </a:xfrm>
           <a:prstGeom prst="rightArrow">
             <a:avLst/>
           </a:prstGeom>
           <a:solidFill>
-            <a:srgbClr val="0D9488"/>
+            <a:srgbClr val="14B8A6"/>
           </a:solidFill>
           <a:ln>
             <a:noFill/>
@@ -5316,18 +5602,18 @@
         </p:nvSpPr>
         <p:spPr>
           <a:xfrm>
-            <a:off x="9966960" y="1920240"/>
-            <a:ext cx="1490472" cy="4251960"/>
+            <a:off x="7406639" y="1874519"/>
+            <a:ext cx="1874519" cy="4389120"/>
           </a:xfrm>
           <a:prstGeom prst="roundRect">
             <a:avLst/>
           </a:prstGeom>
           <a:solidFill>
-            <a:srgbClr val="F8FAFC"/>
+            <a:srgbClr val="FFFFFF"/>
           </a:solidFill>
           <a:ln w="19050">
             <a:solidFill>
-              <a:srgbClr val="CBD5E1"/>
+              <a:srgbClr val="E2E8F0"/>
             </a:solidFill>
           </a:ln>
         </p:spPr>
@@ -5361,8 +5647,8 @@
         </p:nvSpPr>
         <p:spPr>
           <a:xfrm>
-            <a:off x="10149840" y="2057400"/>
-            <a:ext cx="1124712" cy="3977640"/>
+            <a:off x="7516367" y="2743200"/>
+            <a:ext cx="1655063" cy="2926080"/>
           </a:xfrm>
           <a:prstGeom prst="rect">
             <a:avLst/>
@@ -5375,23 +5661,187 @@
           </a:bodyPr>
           <a:lstStyle/>
           <a:p>
-            <a:pPr>
-              <a:defRPr sz="1000" b="1">
-                <a:solidFill>
-                  <a:srgbClr val="0D9488"/>
+            <a:pPr algn="ctr">
+              <a:spcAft>
+                <a:spcPts val="1400"/>
+              </a:spcAft>
+              <a:defRPr sz="1150" b="1">
+                <a:solidFill>
+                  <a:srgbClr val="0F172A"/>
+                </a:solidFill>
+                <a:latin typeface="Arial Black"/>
+              </a:defRPr>
+            </a:pPr>
+            <a:r>
+              <a:t>PROCESSING &amp;</a:t>
+            </a:r>
+            <a:br/>
+            <a:r>
+              <a:t>LOGIC ENGINE</a:t>
+            </a:r>
+          </a:p>
+          <a:p>
+            <a:pPr algn="ctr">
+              <a:defRPr sz="1100">
+                <a:solidFill>
+                  <a:srgbClr val="1E293B"/>
                 </a:solidFill>
                 <a:latin typeface="Arial"/>
               </a:defRPr>
             </a:pPr>
             <a:r>
-              <a:t>DELIVERED OUTCOME</a:t>
-            </a:r>
-          </a:p>
-          <a:p>
-            <a:pPr>
+              <a:t>header forensics,</a:t>
+            </a:r>
+            <a:br/>
+            <a:r>
+              <a:t>SPF/DKIM/DMARC,</a:t>
+            </a:r>
+            <a:br/>
+            <a:r>
+              <a:t>ML scoring, geo-</a:t>
+            </a:r>
+            <a:br/>
+            <a:r>
+              <a:t>confidence,</a:t>
+            </a:r>
+            <a:br/>
+            <a:r>
+              <a:t>campaign graph</a:t>
+            </a:r>
+          </a:p>
+        </p:txBody>
+      </p:sp>
+      <p:sp>
+        <p:nvSpPr>
+          <p:cNvPr id="17" name="Right Arrow 16"/>
+          <p:cNvSpPr/>
+          <p:nvPr/>
+        </p:nvSpPr>
+        <p:spPr>
+          <a:xfrm>
+            <a:off x="9336022" y="3931920"/>
+            <a:ext cx="210312" cy="182880"/>
+          </a:xfrm>
+          <a:prstGeom prst="rightArrow">
+            <a:avLst/>
+          </a:prstGeom>
+          <a:solidFill>
+            <a:srgbClr val="14B8A6"/>
+          </a:solidFill>
+          <a:ln>
+            <a:noFill/>
+          </a:ln>
+        </p:spPr>
+        <p:style>
+          <a:lnRef idx="1">
+            <a:schemeClr val="accent1"/>
+          </a:lnRef>
+          <a:fillRef idx="3">
+            <a:schemeClr val="accent1"/>
+          </a:fillRef>
+          <a:effectRef idx="2">
+            <a:schemeClr val="accent1"/>
+          </a:effectRef>
+          <a:fontRef idx="minor">
+            <a:schemeClr val="lt1"/>
+          </a:fontRef>
+        </p:style>
+        <p:txBody>
+          <a:bodyPr rtlCol="0" anchor="ctr"/>
+          <a:lstStyle/>
+          <a:p>
+            <a:pPr algn="ctr"/>
+          </a:p>
+        </p:txBody>
+      </p:sp>
+      <p:sp>
+        <p:nvSpPr>
+          <p:cNvPr id="18" name="Rounded Rectangle 17"/>
+          <p:cNvSpPr/>
+          <p:nvPr/>
+        </p:nvSpPr>
+        <p:spPr>
+          <a:xfrm>
+            <a:off x="9601198" y="1874519"/>
+            <a:ext cx="1874519" cy="4389120"/>
+          </a:xfrm>
+          <a:prstGeom prst="roundRect">
+            <a:avLst/>
+          </a:prstGeom>
+          <a:solidFill>
+            <a:srgbClr val="FFFFFF"/>
+          </a:solidFill>
+          <a:ln w="19050">
+            <a:solidFill>
+              <a:srgbClr val="E2E8F0"/>
+            </a:solidFill>
+          </a:ln>
+        </p:spPr>
+        <p:style>
+          <a:lnRef idx="1">
+            <a:schemeClr val="accent1"/>
+          </a:lnRef>
+          <a:fillRef idx="3">
+            <a:schemeClr val="accent1"/>
+          </a:fillRef>
+          <a:effectRef idx="2">
+            <a:schemeClr val="accent1"/>
+          </a:effectRef>
+          <a:fontRef idx="minor">
+            <a:schemeClr val="lt1"/>
+          </a:fontRef>
+        </p:style>
+        <p:txBody>
+          <a:bodyPr rtlCol="0" anchor="ctr"/>
+          <a:lstStyle/>
+          <a:p>
+            <a:pPr algn="ctr"/>
+          </a:p>
+        </p:txBody>
+      </p:sp>
+      <p:sp>
+        <p:nvSpPr>
+          <p:cNvPr id="19" name="TextBox 18"/>
+          <p:cNvSpPr txBox="1"/>
+          <p:nvPr/>
+        </p:nvSpPr>
+        <p:spPr>
+          <a:xfrm>
+            <a:off x="9710926" y="2743200"/>
+            <a:ext cx="1655063" cy="2926080"/>
+          </a:xfrm>
+          <a:prstGeom prst="rect">
+            <a:avLst/>
+          </a:prstGeom>
+          <a:noFill/>
+        </p:spPr>
+        <p:txBody>
+          <a:bodyPr wrap="square">
+            <a:spAutoFit/>
+          </a:bodyPr>
+          <a:lstStyle/>
+          <a:p>
+            <a:pPr algn="ctr">
               <a:spcAft>
-                <a:spcPts val="300"/>
+                <a:spcPts val="1400"/>
               </a:spcAft>
+              <a:defRPr sz="1150" b="1">
+                <a:solidFill>
+                  <a:srgbClr val="0F172A"/>
+                </a:solidFill>
+                <a:latin typeface="Arial Black"/>
+              </a:defRPr>
+            </a:pPr>
+            <a:r>
+              <a:t>DELIVERED</a:t>
+            </a:r>
+            <a:br/>
+            <a:r>
+              <a:t>OUTCOME</a:t>
+            </a:r>
+          </a:p>
+          <a:p>
+            <a:pPr algn="ctr">
               <a:defRPr sz="1100">
                 <a:solidFill>
                   <a:srgbClr val="1E293B"/>
@@ -5400,71 +5850,23 @@
               </a:defRPr>
             </a:pPr>
             <a:r>
-              <a:t>• 0-100 Risk Gauge</a:t>
-            </a:r>
-          </a:p>
-          <a:p>
-            <a:pPr>
-              <a:spcAft>
-                <a:spcPts val="300"/>
-              </a:spcAft>
-              <a:defRPr sz="1100">
-                <a:solidFill>
-                  <a:srgbClr val="1E293B"/>
-                </a:solidFill>
-                <a:latin typeface="Arial"/>
-              </a:defRPr>
-            </a:pPr>
-            <a:r>
-              <a:t>• Hop Leaflet Map</a:t>
-            </a:r>
-          </a:p>
-          <a:p>
-            <a:pPr>
-              <a:spcAft>
-                <a:spcPts val="300"/>
-              </a:spcAft>
-              <a:defRPr sz="1100">
-                <a:solidFill>
-                  <a:srgbClr val="1E293B"/>
-                </a:solidFill>
-                <a:latin typeface="Arial"/>
-              </a:defRPr>
-            </a:pPr>
-            <a:r>
-              <a:t>• AI SOC Co-Pilot</a:t>
-            </a:r>
-          </a:p>
-          <a:p>
-            <a:pPr>
-              <a:spcAft>
-                <a:spcPts val="300"/>
-              </a:spcAft>
-              <a:defRPr sz="1100">
-                <a:solidFill>
-                  <a:srgbClr val="1E293B"/>
-                </a:solidFill>
-                <a:latin typeface="Arial"/>
-              </a:defRPr>
-            </a:pPr>
-            <a:r>
-              <a:t>• Verifiable PDF</a:t>
-            </a:r>
-          </a:p>
-          <a:p>
-            <a:pPr>
-              <a:spcAft>
-                <a:spcPts val="300"/>
-              </a:spcAft>
-              <a:defRPr sz="1100">
-                <a:solidFill>
-                  <a:srgbClr val="1E293B"/>
-                </a:solidFill>
-                <a:latin typeface="Arial"/>
-              </a:defRPr>
-            </a:pPr>
-            <a:r>
-              <a:t>• RFC 3161 hashes</a:t>
+              <a:t>risk score with</a:t>
+            </a:r>
+            <a:br/>
+            <a:r>
+              <a:t>reasons, relay trace</a:t>
+            </a:r>
+            <a:br/>
+            <a:r>
+              <a:t>map, campaign view,</a:t>
+            </a:r>
+            <a:br/>
+            <a:r>
+              <a:t>hashed forensic</a:t>
+            </a:r>
+            <a:br/>
+            <a:r>
+              <a:t>report</a:t>
             </a:r>
           </a:p>
         </p:txBody>
@@ -5496,7 +5898,7 @@
         <p:spPr>
           <a:xfrm>
             <a:off x="731520" y="365760"/>
-            <a:ext cx="3657600" cy="640080"/>
+            <a:ext cx="3200400" cy="731520"/>
           </a:xfrm>
           <a:prstGeom prst="rect">
             <a:avLst/>
@@ -5504,21 +5906,34 @@
           <a:noFill/>
         </p:spPr>
         <p:txBody>
-          <a:bodyPr wrap="square">
+          <a:bodyPr wrap="square" lIns="0" tIns="0" rIns="0" bIns="0">
             <a:spAutoFit/>
           </a:bodyPr>
           <a:lstStyle/>
           <a:p>
             <a:pPr>
-              <a:defRPr sz="1300" b="1">
-                <a:solidFill>
-                  <a:srgbClr val="B4141E"/>
+              <a:defRPr sz="1400" b="1">
+                <a:solidFill>
+                  <a:srgbClr val="BE182B"/>
+                </a:solidFill>
+                <a:latin typeface="Arial Black"/>
+              </a:defRPr>
+            </a:pPr>
+            <a:r>
+              <a:t>RAMAIAH</a:t>
+            </a:r>
+          </a:p>
+          <a:p>
+            <a:pPr>
+              <a:defRPr sz="1100">
+                <a:solidFill>
+                  <a:srgbClr val="0F172A"/>
                 </a:solidFill>
                 <a:latin typeface="Arial"/>
               </a:defRPr>
             </a:pPr>
             <a:r>
-              <a:t>RAMAIAH Institute of Technology</a:t>
+              <a:t>Institute of Technology</a:t>
             </a:r>
           </a:p>
         </p:txBody>
@@ -5532,7 +5947,7 @@
         <p:spPr>
           <a:xfrm>
             <a:off x="5120640" y="274320"/>
-            <a:ext cx="2011680" cy="731520"/>
+            <a:ext cx="1950415" cy="822960"/>
           </a:xfrm>
           <a:prstGeom prst="rect">
             <a:avLst/>
@@ -5540,21 +5955,29 @@
           <a:noFill/>
         </p:spPr>
         <p:txBody>
-          <a:bodyPr wrap="none">
+          <a:bodyPr wrap="none" lIns="0" tIns="0" rIns="0" bIns="0">
             <a:spAutoFit/>
           </a:bodyPr>
           <a:lstStyle/>
           <a:p>
-            <a:pPr algn="ctr">
-              <a:defRPr sz="3200" b="1">
-                <a:solidFill>
-                  <a:srgbClr val="EA580C"/>
+            <a:pPr algn="ctr"/>
+            <a:r>
+              <a:rPr sz="3600" b="1">
+                <a:solidFill>
+                  <a:srgbClr val="E73C27"/>
                 </a:solidFill>
                 <a:latin typeface="Arial Black"/>
-              </a:defRPr>
-            </a:pPr>
-            <a:r>
-              <a:t>MLH</a:t>
+              </a:rPr>
+              <a:t>ML</a:t>
+            </a:r>
+            <a:r>
+              <a:rPr sz="3600" b="1">
+                <a:solidFill>
+                  <a:srgbClr val="F59E0B"/>
+                </a:solidFill>
+                <a:latin typeface="Arial Black"/>
+              </a:rPr>
+              <a:t>H</a:t>
             </a:r>
           </a:p>
         </p:txBody>
@@ -5567,8 +5990,8 @@
         </p:nvSpPr>
         <p:spPr>
           <a:xfrm>
-            <a:off x="8412480" y="365760"/>
-            <a:ext cx="3017520" cy="640080"/>
+            <a:off x="8686800" y="365760"/>
+            <a:ext cx="2743200" cy="731520"/>
           </a:xfrm>
           <a:prstGeom prst="rect">
             <a:avLst/>
@@ -5576,21 +5999,34 @@
           <a:noFill/>
         </p:spPr>
         <p:txBody>
-          <a:bodyPr wrap="none">
+          <a:bodyPr wrap="square" lIns="0" tIns="0" rIns="0" bIns="0">
             <a:spAutoFit/>
           </a:bodyPr>
           <a:lstStyle/>
           <a:p>
             <a:pPr algn="r">
-              <a:defRPr sz="1100" b="1">
+              <a:defRPr sz="1200" b="1">
                 <a:solidFill>
                   <a:srgbClr val="0284C7"/>
                 </a:solidFill>
+                <a:latin typeface="Arial Black"/>
+              </a:defRPr>
+            </a:pPr>
+            <a:r>
+              <a:t>IEEE</a:t>
+            </a:r>
+          </a:p>
+          <a:p>
+            <a:pPr algn="r">
+              <a:defRPr sz="1000" b="1">
+                <a:solidFill>
+                  <a:srgbClr val="0F172A"/>
+                </a:solidFill>
                 <a:latin typeface="Arial"/>
               </a:defRPr>
             </a:pPr>
             <a:r>
-              <a:t>IEEE Computational Intelligence Society</a:t>
+              <a:t>Computational Intelligence Society</a:t>
             </a:r>
           </a:p>
         </p:txBody>
@@ -5603,8 +6039,8 @@
         </p:nvSpPr>
         <p:spPr>
           <a:xfrm>
-            <a:off x="731520" y="1051560"/>
-            <a:ext cx="10698480" cy="731520"/>
+            <a:off x="731520" y="1097280"/>
+            <a:ext cx="10728655" cy="685800"/>
           </a:xfrm>
           <a:prstGeom prst="rect">
             <a:avLst/>
@@ -5612,13 +6048,13 @@
           <a:noFill/>
         </p:spPr>
         <p:txBody>
-          <a:bodyPr wrap="none">
+          <a:bodyPr wrap="none" lIns="0" tIns="0" rIns="0" bIns="0">
             <a:spAutoFit/>
           </a:bodyPr>
           <a:lstStyle/>
           <a:p>
             <a:pPr>
-              <a:defRPr sz="2800" b="1">
+              <a:defRPr sz="3200" b="1">
                 <a:solidFill>
                   <a:srgbClr val="0F172A"/>
                 </a:solidFill>
@@ -5639,8 +6075,8 @@
         </p:nvSpPr>
         <p:spPr>
           <a:xfrm>
-            <a:off x="731520" y="6400800"/>
-            <a:ext cx="10698480" cy="320040"/>
+            <a:off x="731520" y="6446520"/>
+            <a:ext cx="10728655" cy="274320"/>
           </a:xfrm>
           <a:prstGeom prst="rect">
             <a:avLst/>
@@ -5648,15 +6084,15 @@
           <a:noFill/>
         </p:spPr>
         <p:txBody>
-          <a:bodyPr wrap="none">
+          <a:bodyPr wrap="none" lIns="0" tIns="0" rIns="0" bIns="0">
             <a:spAutoFit/>
           </a:bodyPr>
           <a:lstStyle/>
           <a:p>
             <a:pPr algn="ctr">
-              <a:defRPr sz="1000">
-                <a:solidFill>
-                  <a:srgbClr val="64748B"/>
+              <a:defRPr sz="1050">
+                <a:solidFill>
+                  <a:srgbClr val="475569"/>
                 </a:solidFill>
                 <a:latin typeface="Arial"/>
               </a:defRPr>
@@ -5675,18 +6111,18 @@
         </p:nvSpPr>
         <p:spPr>
           <a:xfrm>
-            <a:off x="731520" y="1920240"/>
-            <a:ext cx="5166360" cy="2011680"/>
+            <a:off x="731520" y="1874519"/>
+            <a:ext cx="5166360" cy="2103120"/>
           </a:xfrm>
           <a:prstGeom prst="roundRect">
             <a:avLst/>
           </a:prstGeom>
           <a:solidFill>
-            <a:srgbClr val="F8FAFC"/>
+            <a:srgbClr val="FFFFFF"/>
           </a:solidFill>
           <a:ln w="19050">
             <a:solidFill>
-              <a:srgbClr val="CBD5E1"/>
+              <a:srgbClr val="E2E8F0"/>
             </a:solidFill>
           </a:ln>
         </p:spPr>
@@ -5714,124 +6150,24 @@
       </p:sp>
       <p:sp>
         <p:nvSpPr>
-          <p:cNvPr id="8" name="TextBox 7"/>
-          <p:cNvSpPr txBox="1"/>
-          <p:nvPr/>
-        </p:nvSpPr>
-        <p:spPr>
-          <a:xfrm>
-            <a:off x="914400" y="2057400"/>
-            <a:ext cx="4800600" cy="1737360"/>
-          </a:xfrm>
-          <a:prstGeom prst="rect">
-            <a:avLst/>
-          </a:prstGeom>
-          <a:noFill/>
-        </p:spPr>
-        <p:txBody>
-          <a:bodyPr wrap="square">
-            <a:spAutoFit/>
-          </a:bodyPr>
-          <a:lstStyle/>
-          <a:p>
-            <a:pPr>
-              <a:defRPr sz="1000" b="1">
-                <a:solidFill>
-                  <a:srgbClr val="0D9488"/>
-                </a:solidFill>
-                <a:latin typeface="Arial"/>
-              </a:defRPr>
-            </a:pPr>
-            <a:r>
-              <a:t>MODEL SELECTION &amp; ENSEMBLE</a:t>
-            </a:r>
-          </a:p>
-          <a:p>
-            <a:pPr>
-              <a:spcAft>
-                <a:spcPts val="300"/>
-              </a:spcAft>
-              <a:defRPr sz="1100">
-                <a:solidFill>
-                  <a:srgbClr val="1E293B"/>
-                </a:solidFill>
-                <a:latin typeface="Arial"/>
-              </a:defRPr>
-            </a:pPr>
-            <a:r>
-              <a:t>• NVIDIA NIM Cloud Accelerator: meta/llama-3.2-11b-vision-instruct</a:t>
-            </a:r>
-          </a:p>
-          <a:p>
-            <a:pPr>
-              <a:spcAft>
-                <a:spcPts val="300"/>
-              </a:spcAft>
-              <a:defRPr sz="1100">
-                <a:solidFill>
-                  <a:srgbClr val="1E293B"/>
-                </a:solidFill>
-                <a:latin typeface="Arial"/>
-              </a:defRPr>
-            </a:pPr>
-            <a:r>
-              <a:t>• 5-Model Multi-LLM Consensus: Llama 3.2, Gemma 2, Mistral, Qwen 2.5, DeepSeek R1</a:t>
-            </a:r>
-          </a:p>
-          <a:p>
-            <a:pPr>
-              <a:spcAft>
-                <a:spcPts val="300"/>
-              </a:spcAft>
-              <a:defRPr sz="1100">
-                <a:solidFill>
-                  <a:srgbClr val="1E293B"/>
-                </a:solidFill>
-                <a:latin typeface="Arial"/>
-              </a:defRPr>
-            </a:pPr>
-            <a:r>
-              <a:t>• Zero-Latency NLP Engine: Deterministic rule and token analysis</a:t>
-            </a:r>
-          </a:p>
-          <a:p>
-            <a:pPr>
-              <a:spcAft>
-                <a:spcPts val="300"/>
-              </a:spcAft>
-              <a:defRPr sz="1100">
-                <a:solidFill>
-                  <a:srgbClr val="1E293B"/>
-                </a:solidFill>
-                <a:latin typeface="Arial"/>
-              </a:defRPr>
-            </a:pPr>
-            <a:r>
-              <a:t>• LightGBM Multi-Signal Classifier for calibrated 0-100 risk scoring.</a:t>
-            </a:r>
-          </a:p>
-        </p:txBody>
-      </p:sp>
-      <p:sp>
-        <p:nvSpPr>
-          <p:cNvPr id="9" name="Rounded Rectangle 8"/>
+          <p:cNvPr id="8" name="Rounded Rectangle 7"/>
           <p:cNvSpPr/>
           <p:nvPr/>
         </p:nvSpPr>
         <p:spPr>
           <a:xfrm>
-            <a:off x="6263640" y="1920240"/>
-            <a:ext cx="5166360" cy="2011680"/>
+            <a:off x="960120" y="2075687"/>
+            <a:ext cx="1965960" cy="320040"/>
           </a:xfrm>
           <a:prstGeom prst="roundRect">
             <a:avLst/>
           </a:prstGeom>
           <a:solidFill>
-            <a:srgbClr val="F8FAFC"/>
+            <a:srgbClr val="FFFFFF"/>
           </a:solidFill>
           <a:ln w="19050">
             <a:solidFill>
-              <a:srgbClr val="CBD5E1"/>
+              <a:srgbClr val="14B8A6"/>
             </a:solidFill>
           </a:ln>
         </p:spPr>
@@ -5850,23 +6186,33 @@
           </a:fontRef>
         </p:style>
         <p:txBody>
-          <a:bodyPr rtlCol="0" anchor="ctr"/>
-          <a:lstStyle/>
-          <a:p>
-            <a:pPr algn="ctr"/>
-          </a:p>
-        </p:txBody>
-      </p:sp>
-      <p:sp>
-        <p:nvSpPr>
-          <p:cNvPr id="10" name="TextBox 9"/>
+          <a:bodyPr rtlCol="0" anchor="ctr" lIns="0" tIns="0" rIns="0" bIns="0"/>
+          <a:lstStyle/>
+          <a:p>
+            <a:pPr algn="ctr">
+              <a:defRPr sz="950" b="1">
+                <a:solidFill>
+                  <a:srgbClr val="0D9488"/>
+                </a:solidFill>
+                <a:latin typeface="Arial"/>
+              </a:defRPr>
+            </a:pPr>
+            <a:r>
+              <a:t>MODEL SELECTION</a:t>
+            </a:r>
+          </a:p>
+        </p:txBody>
+      </p:sp>
+      <p:sp>
+        <p:nvSpPr>
+          <p:cNvPr id="9" name="TextBox 8"/>
           <p:cNvSpPr txBox="1"/>
           <p:nvPr/>
         </p:nvSpPr>
         <p:spPr>
           <a:xfrm>
-            <a:off x="6446520" y="2057400"/>
-            <a:ext cx="4800600" cy="1737360"/>
+            <a:off x="960120" y="2496311"/>
+            <a:ext cx="4709160" cy="1389888"/>
           </a:xfrm>
           <a:prstGeom prst="rect">
             <a:avLst/>
@@ -5874,109 +6220,45 @@
           <a:noFill/>
         </p:spPr>
         <p:txBody>
-          <a:bodyPr wrap="square">
+          <a:bodyPr wrap="square" lIns="0" tIns="0" rIns="0" bIns="0">
             <a:spAutoFit/>
           </a:bodyPr>
           <a:lstStyle/>
           <a:p>
             <a:pPr>
-              <a:defRPr sz="1000" b="1">
-                <a:solidFill>
-                  <a:srgbClr val="0D9488"/>
+              <a:defRPr sz="1150">
+                <a:solidFill>
+                  <a:srgbClr val="1E293B"/>
                 </a:solidFill>
                 <a:latin typeface="Arial"/>
               </a:defRPr>
             </a:pPr>
             <a:r>
-              <a:t>PIPELINE ROLE</a:t>
-            </a:r>
-          </a:p>
-          <a:p>
-            <a:pPr>
-              <a:spcAft>
-                <a:spcPts val="300"/>
-              </a:spcAft>
-              <a:defRPr sz="1100">
-                <a:solidFill>
-                  <a:srgbClr val="1E293B"/>
-                </a:solidFill>
-                <a:latin typeface="Arial"/>
-              </a:defRPr>
-            </a:pPr>
-            <a:r>
-              <a:t>• Cloud NIM extracts deception intent, urgency indicators, and wire requests.</a:t>
-            </a:r>
-          </a:p>
-          <a:p>
-            <a:pPr>
-              <a:spcAft>
-                <a:spcPts val="300"/>
-              </a:spcAft>
-              <a:defRPr sz="1100">
-                <a:solidFill>
-                  <a:srgbClr val="1E293B"/>
-                </a:solidFill>
-                <a:latin typeface="Arial"/>
-              </a:defRPr>
-            </a:pPr>
-            <a:r>
-              <a:t>• Multi-LLM consensus prevents single-model hallucinations.</a:t>
-            </a:r>
-          </a:p>
-          <a:p>
-            <a:pPr>
-              <a:spcAft>
-                <a:spcPts val="300"/>
-              </a:spcAft>
-              <a:defRPr sz="1100">
-                <a:solidFill>
-                  <a:srgbClr val="1E293B"/>
-                </a:solidFill>
-                <a:latin typeface="Arial"/>
-              </a:defRPr>
-            </a:pPr>
-            <a:r>
-              <a:t>• TF-IDF feature embeddings correlate shared attack infrastructure across campaigns.</a:t>
-            </a:r>
-          </a:p>
-          <a:p>
-            <a:pPr>
-              <a:spcAft>
-                <a:spcPts val="300"/>
-              </a:spcAft>
-              <a:defRPr sz="1100">
-                <a:solidFill>
-                  <a:srgbClr val="1E293B"/>
-                </a:solidFill>
-                <a:latin typeface="Arial"/>
-              </a:defRPr>
-            </a:pPr>
-            <a:r>
-              <a:t>• AI SOC Co-Pilot assists analysts with explainable incident summaries.</a:t>
-            </a:r>
-          </a:p>
-        </p:txBody>
-      </p:sp>
-      <p:sp>
-        <p:nvSpPr>
-          <p:cNvPr id="11" name="Rounded Rectangle 10"/>
+              <a:t>Open-weight Qwen2.5-7B-Instruct or Llama 3.1 8B (Cloud via Ollama)/ grok/gemini ; XLM-R / MuRIL for Hindi-English text; LightGBM classifier.</a:t>
+            </a:r>
+          </a:p>
+        </p:txBody>
+      </p:sp>
+      <p:sp>
+        <p:nvSpPr>
+          <p:cNvPr id="10" name="Rounded Rectangle 9"/>
           <p:cNvSpPr/>
           <p:nvPr/>
         </p:nvSpPr>
         <p:spPr>
           <a:xfrm>
-            <a:off x="731520" y="4160520"/>
-            <a:ext cx="5166360" cy="2011680"/>
+            <a:off x="6291072" y="1874519"/>
+            <a:ext cx="5166360" cy="2103120"/>
           </a:xfrm>
           <a:prstGeom prst="roundRect">
             <a:avLst/>
           </a:prstGeom>
           <a:solidFill>
-            <a:srgbClr val="F8FAFC"/>
+            <a:srgbClr val="FFFFFF"/>
           </a:solidFill>
           <a:ln w="19050">
             <a:solidFill>
-              <a:srgbClr val="CBD5E1"/>
+              <a:srgbClr val="E2E8F0"/>
             </a:solidFill>
           </a:ln>
         </p:spPr>
@@ -6004,124 +6286,24 @@
       </p:sp>
       <p:sp>
         <p:nvSpPr>
-          <p:cNvPr id="12" name="TextBox 11"/>
-          <p:cNvSpPr txBox="1"/>
-          <p:nvPr/>
-        </p:nvSpPr>
-        <p:spPr>
-          <a:xfrm>
-            <a:off x="914400" y="4297680"/>
-            <a:ext cx="4800600" cy="1737360"/>
-          </a:xfrm>
-          <a:prstGeom prst="rect">
-            <a:avLst/>
-          </a:prstGeom>
-          <a:noFill/>
-        </p:spPr>
-        <p:txBody>
-          <a:bodyPr wrap="square">
-            <a:spAutoFit/>
-          </a:bodyPr>
-          <a:lstStyle/>
-          <a:p>
-            <a:pPr>
-              <a:defRPr sz="1000" b="1">
-                <a:solidFill>
-                  <a:srgbClr val="0D9488"/>
-                </a:solidFill>
-                <a:latin typeface="Arial"/>
-              </a:defRPr>
-            </a:pPr>
-            <a:r>
-              <a:t>TECHNICAL RATIONALE</a:t>
-            </a:r>
-          </a:p>
-          <a:p>
-            <a:pPr>
-              <a:spcAft>
-                <a:spcPts val="300"/>
-              </a:spcAft>
-              <a:defRPr sz="1100">
-                <a:solidFill>
-                  <a:srgbClr val="1E293B"/>
-                </a:solidFill>
-                <a:latin typeface="Arial"/>
-              </a:defRPr>
-            </a:pPr>
-            <a:r>
-              <a:t>• Sub-350ms response latency with NVIDIA NIM hardware acceleration.</a:t>
-            </a:r>
-          </a:p>
-          <a:p>
-            <a:pPr>
-              <a:spcAft>
-                <a:spcPts val="300"/>
-              </a:spcAft>
-              <a:defRPr sz="1100">
-                <a:solidFill>
-                  <a:srgbClr val="1E293B"/>
-                </a:solidFill>
-                <a:latin typeface="Arial"/>
-              </a:defRPr>
-            </a:pPr>
-            <a:r>
-              <a:t>• 100% offline zero-latency fallback: operates air-gapped without API keys.</a:t>
-            </a:r>
-          </a:p>
-          <a:p>
-            <a:pPr>
-              <a:spcAft>
-                <a:spcPts val="300"/>
-              </a:spcAft>
-              <a:defRPr sz="1100">
-                <a:solidFill>
-                  <a:srgbClr val="1E293B"/>
-                </a:solidFill>
-                <a:latin typeface="Arial"/>
-              </a:defRPr>
-            </a:pPr>
-            <a:r>
-              <a:t>• Open-weight transparency: fully inspectable and auditable reasoning.</a:t>
-            </a:r>
-          </a:p>
-          <a:p>
-            <a:pPr>
-              <a:spcAft>
-                <a:spcPts val="300"/>
-              </a:spcAft>
-              <a:defRPr sz="1100">
-                <a:solidFill>
-                  <a:srgbClr val="1E293B"/>
-                </a:solidFill>
-                <a:latin typeface="Arial"/>
-              </a:defRPr>
-            </a:pPr>
-            <a:r>
-              <a:t>• Zero telemetry leakage: user emails are never stored or fine-tuned upon.</a:t>
-            </a:r>
-          </a:p>
-        </p:txBody>
-      </p:sp>
-      <p:sp>
-        <p:nvSpPr>
-          <p:cNvPr id="13" name="Rounded Rectangle 12"/>
+          <p:cNvPr id="11" name="Rounded Rectangle 10"/>
           <p:cNvSpPr/>
           <p:nvPr/>
         </p:nvSpPr>
         <p:spPr>
           <a:xfrm>
-            <a:off x="6263640" y="4160520"/>
-            <a:ext cx="5166360" cy="2011680"/>
+            <a:off x="6519672" y="2075687"/>
+            <a:ext cx="1764792" cy="320040"/>
           </a:xfrm>
           <a:prstGeom prst="roundRect">
             <a:avLst/>
           </a:prstGeom>
           <a:solidFill>
-            <a:srgbClr val="F8FAFC"/>
+            <a:srgbClr val="FFFFFF"/>
           </a:solidFill>
           <a:ln w="19050">
             <a:solidFill>
-              <a:srgbClr val="CBD5E1"/>
+              <a:srgbClr val="14B8A6"/>
             </a:solidFill>
           </a:ln>
         </p:spPr>
@@ -6140,23 +6322,33 @@
           </a:fontRef>
         </p:style>
         <p:txBody>
-          <a:bodyPr rtlCol="0" anchor="ctr"/>
-          <a:lstStyle/>
-          <a:p>
-            <a:pPr algn="ctr"/>
-          </a:p>
-        </p:txBody>
-      </p:sp>
-      <p:sp>
-        <p:nvSpPr>
-          <p:cNvPr id="14" name="TextBox 13"/>
+          <a:bodyPr rtlCol="0" anchor="ctr" lIns="0" tIns="0" rIns="0" bIns="0"/>
+          <a:lstStyle/>
+          <a:p>
+            <a:pPr algn="ctr">
+              <a:defRPr sz="950" b="1">
+                <a:solidFill>
+                  <a:srgbClr val="0D9488"/>
+                </a:solidFill>
+                <a:latin typeface="Arial"/>
+              </a:defRPr>
+            </a:pPr>
+            <a:r>
+              <a:t>PIPELINE ROLE</a:t>
+            </a:r>
+          </a:p>
+        </p:txBody>
+      </p:sp>
+      <p:sp>
+        <p:nvSpPr>
+          <p:cNvPr id="12" name="TextBox 11"/>
           <p:cNvSpPr txBox="1"/>
           <p:nvPr/>
         </p:nvSpPr>
         <p:spPr>
           <a:xfrm>
-            <a:off x="6446520" y="4297680"/>
-            <a:ext cx="4800600" cy="1737360"/>
+            <a:off x="6519672" y="2496311"/>
+            <a:ext cx="4709160" cy="1389888"/>
           </a:xfrm>
           <a:prstGeom prst="rect">
             <a:avLst/>
@@ -6164,13 +6356,113 @@
           <a:noFill/>
         </p:spPr>
         <p:txBody>
-          <a:bodyPr wrap="square">
+          <a:bodyPr wrap="square" lIns="0" tIns="0" rIns="0" bIns="0">
             <a:spAutoFit/>
           </a:bodyPr>
           <a:lstStyle/>
           <a:p>
             <a:pPr>
-              <a:defRPr sz="1000" b="1">
+              <a:defRPr sz="1150">
+                <a:solidFill>
+                  <a:srgbClr val="1E293B"/>
+                </a:solidFill>
+                <a:latin typeface="Arial"/>
+              </a:defRPr>
+            </a:pPr>
+            <a:r>
+              <a:t>Local LLM extracts BEC intent and explains verdicts; embeddings cluster similar emails; LightGBM fuses signals into a risk score.</a:t>
+            </a:r>
+          </a:p>
+        </p:txBody>
+      </p:sp>
+      <p:sp>
+        <p:nvSpPr>
+          <p:cNvPr id="13" name="Rounded Rectangle 12"/>
+          <p:cNvSpPr/>
+          <p:nvPr/>
+        </p:nvSpPr>
+        <p:spPr>
+          <a:xfrm>
+            <a:off x="731520" y="4160520"/>
+            <a:ext cx="5166360" cy="2103120"/>
+          </a:xfrm>
+          <a:prstGeom prst="roundRect">
+            <a:avLst/>
+          </a:prstGeom>
+          <a:solidFill>
+            <a:srgbClr val="FFFFFF"/>
+          </a:solidFill>
+          <a:ln w="19050">
+            <a:solidFill>
+              <a:srgbClr val="E2E8F0"/>
+            </a:solidFill>
+          </a:ln>
+        </p:spPr>
+        <p:style>
+          <a:lnRef idx="1">
+            <a:schemeClr val="accent1"/>
+          </a:lnRef>
+          <a:fillRef idx="3">
+            <a:schemeClr val="accent1"/>
+          </a:fillRef>
+          <a:effectRef idx="2">
+            <a:schemeClr val="accent1"/>
+          </a:effectRef>
+          <a:fontRef idx="minor">
+            <a:schemeClr val="lt1"/>
+          </a:fontRef>
+        </p:style>
+        <p:txBody>
+          <a:bodyPr rtlCol="0" anchor="ctr"/>
+          <a:lstStyle/>
+          <a:p>
+            <a:pPr algn="ctr"/>
+          </a:p>
+        </p:txBody>
+      </p:sp>
+      <p:sp>
+        <p:nvSpPr>
+          <p:cNvPr id="14" name="Rounded Rectangle 13"/>
+          <p:cNvSpPr/>
+          <p:nvPr/>
+        </p:nvSpPr>
+        <p:spPr>
+          <a:xfrm>
+            <a:off x="960120" y="4361688"/>
+            <a:ext cx="2368296" cy="320040"/>
+          </a:xfrm>
+          <a:prstGeom prst="roundRect">
+            <a:avLst/>
+          </a:prstGeom>
+          <a:solidFill>
+            <a:srgbClr val="FFFFFF"/>
+          </a:solidFill>
+          <a:ln w="19050">
+            <a:solidFill>
+              <a:srgbClr val="14B8A6"/>
+            </a:solidFill>
+          </a:ln>
+        </p:spPr>
+        <p:style>
+          <a:lnRef idx="1">
+            <a:schemeClr val="accent1"/>
+          </a:lnRef>
+          <a:fillRef idx="3">
+            <a:schemeClr val="accent1"/>
+          </a:fillRef>
+          <a:effectRef idx="2">
+            <a:schemeClr val="accent1"/>
+          </a:effectRef>
+          <a:fontRef idx="minor">
+            <a:schemeClr val="lt1"/>
+          </a:fontRef>
+        </p:style>
+        <p:txBody>
+          <a:bodyPr rtlCol="0" anchor="ctr" lIns="0" tIns="0" rIns="0" bIns="0"/>
+          <a:lstStyle/>
+          <a:p>
+            <a:pPr algn="ctr">
+              <a:defRPr sz="950" b="1">
                 <a:solidFill>
                   <a:srgbClr val="0D9488"/>
                 </a:solidFill>
@@ -6178,15 +6470,171 @@
               </a:defRPr>
             </a:pPr>
             <a:r>
+              <a:t>TECHNICAL RATIONALE</a:t>
+            </a:r>
+          </a:p>
+        </p:txBody>
+      </p:sp>
+      <p:sp>
+        <p:nvSpPr>
+          <p:cNvPr id="15" name="TextBox 14"/>
+          <p:cNvSpPr txBox="1"/>
+          <p:nvPr/>
+        </p:nvSpPr>
+        <p:spPr>
+          <a:xfrm>
+            <a:off x="960120" y="4782312"/>
+            <a:ext cx="4709160" cy="1389888"/>
+          </a:xfrm>
+          <a:prstGeom prst="rect">
+            <a:avLst/>
+          </a:prstGeom>
+          <a:noFill/>
+        </p:spPr>
+        <p:txBody>
+          <a:bodyPr wrap="square" lIns="0" tIns="0" rIns="0" bIns="0">
+            <a:spAutoFit/>
+          </a:bodyPr>
+          <a:lstStyle/>
+          <a:p>
+            <a:pPr>
+              <a:defRPr sz="1150">
+                <a:solidFill>
+                  <a:srgbClr val="1E293B"/>
+                </a:solidFill>
+                <a:latin typeface="Arial"/>
+              </a:defRPr>
+            </a:pPr>
+            <a:r>
+              <a:t>Laptop-friendly with low latency; emails never leave the machine; open weights are auditable; multilingual models handle Hinglish.</a:t>
+            </a:r>
+          </a:p>
+        </p:txBody>
+      </p:sp>
+      <p:sp>
+        <p:nvSpPr>
+          <p:cNvPr id="16" name="Rounded Rectangle 15"/>
+          <p:cNvSpPr/>
+          <p:nvPr/>
+        </p:nvSpPr>
+        <p:spPr>
+          <a:xfrm>
+            <a:off x="6291072" y="4160520"/>
+            <a:ext cx="5166360" cy="2103120"/>
+          </a:xfrm>
+          <a:prstGeom prst="roundRect">
+            <a:avLst/>
+          </a:prstGeom>
+          <a:solidFill>
+            <a:srgbClr val="FFFFFF"/>
+          </a:solidFill>
+          <a:ln w="19050">
+            <a:solidFill>
+              <a:srgbClr val="E2E8F0"/>
+            </a:solidFill>
+          </a:ln>
+        </p:spPr>
+        <p:style>
+          <a:lnRef idx="1">
+            <a:schemeClr val="accent1"/>
+          </a:lnRef>
+          <a:fillRef idx="3">
+            <a:schemeClr val="accent1"/>
+          </a:fillRef>
+          <a:effectRef idx="2">
+            <a:schemeClr val="accent1"/>
+          </a:effectRef>
+          <a:fontRef idx="minor">
+            <a:schemeClr val="lt1"/>
+          </a:fontRef>
+        </p:style>
+        <p:txBody>
+          <a:bodyPr rtlCol="0" anchor="ctr"/>
+          <a:lstStyle/>
+          <a:p>
+            <a:pPr algn="ctr"/>
+          </a:p>
+        </p:txBody>
+      </p:sp>
+      <p:sp>
+        <p:nvSpPr>
+          <p:cNvPr id="17" name="Rounded Rectangle 16"/>
+          <p:cNvSpPr/>
+          <p:nvPr/>
+        </p:nvSpPr>
+        <p:spPr>
+          <a:xfrm>
+            <a:off x="6519672" y="4361688"/>
+            <a:ext cx="2871216" cy="320040"/>
+          </a:xfrm>
+          <a:prstGeom prst="roundRect">
+            <a:avLst/>
+          </a:prstGeom>
+          <a:solidFill>
+            <a:srgbClr val="FFFFFF"/>
+          </a:solidFill>
+          <a:ln w="19050">
+            <a:solidFill>
+              <a:srgbClr val="14B8A6"/>
+            </a:solidFill>
+          </a:ln>
+        </p:spPr>
+        <p:style>
+          <a:lnRef idx="1">
+            <a:schemeClr val="accent1"/>
+          </a:lnRef>
+          <a:fillRef idx="3">
+            <a:schemeClr val="accent1"/>
+          </a:fillRef>
+          <a:effectRef idx="2">
+            <a:schemeClr val="accent1"/>
+          </a:effectRef>
+          <a:fontRef idx="minor">
+            <a:schemeClr val="lt1"/>
+          </a:fontRef>
+        </p:style>
+        <p:txBody>
+          <a:bodyPr rtlCol="0" anchor="ctr" lIns="0" tIns="0" rIns="0" bIns="0"/>
+          <a:lstStyle/>
+          <a:p>
+            <a:pPr algn="ctr">
+              <a:defRPr sz="950" b="1">
+                <a:solidFill>
+                  <a:srgbClr val="0D9488"/>
+                </a:solidFill>
+                <a:latin typeface="Arial"/>
+              </a:defRPr>
+            </a:pPr>
+            <a:r>
               <a:t>EXTERNAL SERVICES / APIS</a:t>
             </a:r>
           </a:p>
+        </p:txBody>
+      </p:sp>
+      <p:sp>
+        <p:nvSpPr>
+          <p:cNvPr id="18" name="TextBox 17"/>
+          <p:cNvSpPr txBox="1"/>
+          <p:nvPr/>
+        </p:nvSpPr>
+        <p:spPr>
+          <a:xfrm>
+            <a:off x="6519672" y="4782312"/>
+            <a:ext cx="4709160" cy="1389888"/>
+          </a:xfrm>
+          <a:prstGeom prst="rect">
+            <a:avLst/>
+          </a:prstGeom>
+          <a:noFill/>
+        </p:spPr>
+        <p:txBody>
+          <a:bodyPr wrap="square" lIns="0" tIns="0" rIns="0" bIns="0">
+            <a:spAutoFit/>
+          </a:bodyPr>
+          <a:lstStyle/>
           <a:p>
             <a:pPr>
-              <a:spcAft>
-                <a:spcPts val="300"/>
-              </a:spcAft>
-              <a:defRPr sz="1100">
+              <a:defRPr sz="1150">
                 <a:solidFill>
                   <a:srgbClr val="1E293B"/>
                 </a:solidFill>
@@ -6194,55 +6642,7 @@
               </a:defRPr>
             </a:pPr>
             <a:r>
-              <a:t>• NVIDIA NIM Open Inference (integrate.api.nvidia.com)</a:t>
-            </a:r>
-          </a:p>
-          <a:p>
-            <a:pPr>
-              <a:spcAft>
-                <a:spcPts val="300"/>
-              </a:spcAft>
-              <a:defRPr sz="1100">
-                <a:solidFill>
-                  <a:srgbClr val="1E293B"/>
-                </a:solidFill>
-                <a:latin typeface="Arial"/>
-              </a:defRPr>
-            </a:pPr>
-            <a:r>
-              <a:t>• IP-API &amp; DB-IP Lite Geolocation with offline local caching</a:t>
-            </a:r>
-          </a:p>
-          <a:p>
-            <a:pPr>
-              <a:spcAft>
-                <a:spcPts val="300"/>
-              </a:spcAft>
-              <a:defRPr sz="1100">
-                <a:solidFill>
-                  <a:srgbClr val="1E293B"/>
-                </a:solidFill>
-                <a:latin typeface="Arial"/>
-              </a:defRPr>
-            </a:pPr>
-            <a:r>
-              <a:t>• Tor Exit Node, Proxy, and Known Malicious Relay Blocklists</a:t>
-            </a:r>
-          </a:p>
-          <a:p>
-            <a:pPr>
-              <a:spcAft>
-                <a:spcPts val="300"/>
-              </a:spcAft>
-              <a:defRPr sz="1100">
-                <a:solidFill>
-                  <a:srgbClr val="1E293B"/>
-                </a:solidFill>
-                <a:latin typeface="Arial"/>
-              </a:defRPr>
-            </a:pPr>
-            <a:r>
-              <a:t>• RFC 3161 SHA-256 cryptographic chain of custody hashing</a:t>
+              <a:t>GeoLite2 / DB-IP Lite, RDAP/WHOIS, Tor and blocklists, public phishing corpora (Nazario, SpamAssassin), NetworkX.</a:t>
             </a:r>
           </a:p>
         </p:txBody>
@@ -6274,7 +6674,7 @@
         <p:spPr>
           <a:xfrm>
             <a:off x="731520" y="365760"/>
-            <a:ext cx="3657600" cy="640080"/>
+            <a:ext cx="3200400" cy="731520"/>
           </a:xfrm>
           <a:prstGeom prst="rect">
             <a:avLst/>
@@ -6282,21 +6682,34 @@
           <a:noFill/>
         </p:spPr>
         <p:txBody>
-          <a:bodyPr wrap="square">
+          <a:bodyPr wrap="square" lIns="0" tIns="0" rIns="0" bIns="0">
             <a:spAutoFit/>
           </a:bodyPr>
           <a:lstStyle/>
           <a:p>
             <a:pPr>
-              <a:defRPr sz="1300" b="1">
-                <a:solidFill>
-                  <a:srgbClr val="B4141E"/>
+              <a:defRPr sz="1400" b="1">
+                <a:solidFill>
+                  <a:srgbClr val="BE182B"/>
+                </a:solidFill>
+                <a:latin typeface="Arial Black"/>
+              </a:defRPr>
+            </a:pPr>
+            <a:r>
+              <a:t>RAMAIAH</a:t>
+            </a:r>
+          </a:p>
+          <a:p>
+            <a:pPr>
+              <a:defRPr sz="1100">
+                <a:solidFill>
+                  <a:srgbClr val="0F172A"/>
                 </a:solidFill>
                 <a:latin typeface="Arial"/>
               </a:defRPr>
             </a:pPr>
             <a:r>
-              <a:t>RAMAIAH Institute of Technology</a:t>
+              <a:t>Institute of Technology</a:t>
             </a:r>
           </a:p>
         </p:txBody>
@@ -6310,7 +6723,7 @@
         <p:spPr>
           <a:xfrm>
             <a:off x="5120640" y="274320"/>
-            <a:ext cx="2011680" cy="731520"/>
+            <a:ext cx="1950415" cy="822960"/>
           </a:xfrm>
           <a:prstGeom prst="rect">
             <a:avLst/>
@@ -6318,21 +6731,29 @@
           <a:noFill/>
         </p:spPr>
         <p:txBody>
-          <a:bodyPr wrap="none">
+          <a:bodyPr wrap="none" lIns="0" tIns="0" rIns="0" bIns="0">
             <a:spAutoFit/>
           </a:bodyPr>
           <a:lstStyle/>
           <a:p>
-            <a:pPr algn="ctr">
-              <a:defRPr sz="3200" b="1">
-                <a:solidFill>
-                  <a:srgbClr val="EA580C"/>
+            <a:pPr algn="ctr"/>
+            <a:r>
+              <a:rPr sz="3600" b="1">
+                <a:solidFill>
+                  <a:srgbClr val="E73C27"/>
                 </a:solidFill>
                 <a:latin typeface="Arial Black"/>
-              </a:defRPr>
-            </a:pPr>
-            <a:r>
-              <a:t>MLH</a:t>
+              </a:rPr>
+              <a:t>ML</a:t>
+            </a:r>
+            <a:r>
+              <a:rPr sz="3600" b="1">
+                <a:solidFill>
+                  <a:srgbClr val="F59E0B"/>
+                </a:solidFill>
+                <a:latin typeface="Arial Black"/>
+              </a:rPr>
+              <a:t>H</a:t>
             </a:r>
           </a:p>
         </p:txBody>
@@ -6345,8 +6766,8 @@
         </p:nvSpPr>
         <p:spPr>
           <a:xfrm>
-            <a:off x="8412480" y="365760"/>
-            <a:ext cx="3017520" cy="640080"/>
+            <a:off x="8686800" y="365760"/>
+            <a:ext cx="2743200" cy="731520"/>
           </a:xfrm>
           <a:prstGeom prst="rect">
             <a:avLst/>
@@ -6354,21 +6775,34 @@
           <a:noFill/>
         </p:spPr>
         <p:txBody>
-          <a:bodyPr wrap="none">
+          <a:bodyPr wrap="square" lIns="0" tIns="0" rIns="0" bIns="0">
             <a:spAutoFit/>
           </a:bodyPr>
           <a:lstStyle/>
           <a:p>
             <a:pPr algn="r">
-              <a:defRPr sz="1100" b="1">
+              <a:defRPr sz="1200" b="1">
                 <a:solidFill>
                   <a:srgbClr val="0284C7"/>
                 </a:solidFill>
+                <a:latin typeface="Arial Black"/>
+              </a:defRPr>
+            </a:pPr>
+            <a:r>
+              <a:t>IEEE</a:t>
+            </a:r>
+          </a:p>
+          <a:p>
+            <a:pPr algn="r">
+              <a:defRPr sz="1000" b="1">
+                <a:solidFill>
+                  <a:srgbClr val="0F172A"/>
+                </a:solidFill>
                 <a:latin typeface="Arial"/>
               </a:defRPr>
             </a:pPr>
             <a:r>
-              <a:t>IEEE Computational Intelligence Society</a:t>
+              <a:t>Computational Intelligence Society</a:t>
             </a:r>
           </a:p>
         </p:txBody>
@@ -6381,8 +6815,8 @@
         </p:nvSpPr>
         <p:spPr>
           <a:xfrm>
-            <a:off x="731520" y="1051560"/>
-            <a:ext cx="10698480" cy="731520"/>
+            <a:off x="731520" y="1097280"/>
+            <a:ext cx="10728655" cy="685800"/>
           </a:xfrm>
           <a:prstGeom prst="rect">
             <a:avLst/>
@@ -6390,13 +6824,13 @@
           <a:noFill/>
         </p:spPr>
         <p:txBody>
-          <a:bodyPr wrap="none">
+          <a:bodyPr wrap="none" lIns="0" tIns="0" rIns="0" bIns="0">
             <a:spAutoFit/>
           </a:bodyPr>
           <a:lstStyle/>
           <a:p>
             <a:pPr>
-              <a:defRPr sz="2800" b="1">
+              <a:defRPr sz="3200" b="1">
                 <a:solidFill>
                   <a:srgbClr val="0F172A"/>
                 </a:solidFill>
@@ -6417,8 +6851,8 @@
         </p:nvSpPr>
         <p:spPr>
           <a:xfrm>
-            <a:off x="731520" y="6400800"/>
-            <a:ext cx="10698480" cy="320040"/>
+            <a:off x="731520" y="6446520"/>
+            <a:ext cx="10728655" cy="274320"/>
           </a:xfrm>
           <a:prstGeom prst="rect">
             <a:avLst/>
@@ -6426,15 +6860,15 @@
           <a:noFill/>
         </p:spPr>
         <p:txBody>
-          <a:bodyPr wrap="none">
+          <a:bodyPr wrap="none" lIns="0" tIns="0" rIns="0" bIns="0">
             <a:spAutoFit/>
           </a:bodyPr>
           <a:lstStyle/>
           <a:p>
             <a:pPr algn="ctr">
-              <a:defRPr sz="1000">
-                <a:solidFill>
-                  <a:srgbClr val="64748B"/>
+              <a:defRPr sz="1050">
+                <a:solidFill>
+                  <a:srgbClr val="475569"/>
                 </a:solidFill>
                 <a:latin typeface="Arial"/>
               </a:defRPr>
@@ -6453,18 +6887,18 @@
         </p:nvSpPr>
         <p:spPr>
           <a:xfrm>
-            <a:off x="731520" y="1920240"/>
-            <a:ext cx="4114800" cy="3474720"/>
+            <a:off x="731520" y="1874519"/>
+            <a:ext cx="4389120" cy="3383280"/>
           </a:xfrm>
           <a:prstGeom prst="roundRect">
             <a:avLst/>
           </a:prstGeom>
           <a:solidFill>
-            <a:srgbClr val="F8FAFC"/>
+            <a:srgbClr val="FFFFFF"/>
           </a:solidFill>
           <a:ln w="19050">
             <a:solidFill>
-              <a:srgbClr val="CBD5E1"/>
+              <a:srgbClr val="E2E8F0"/>
             </a:solidFill>
           </a:ln>
         </p:spPr>
@@ -6492,14 +6926,69 @@
       </p:sp>
       <p:sp>
         <p:nvSpPr>
-          <p:cNvPr id="8" name="TextBox 7"/>
+          <p:cNvPr id="8" name="Rounded Rectangle 7"/>
+          <p:cNvSpPr/>
+          <p:nvPr/>
+        </p:nvSpPr>
+        <p:spPr>
+          <a:xfrm>
+            <a:off x="960120" y="2075687"/>
+            <a:ext cx="2368296" cy="320040"/>
+          </a:xfrm>
+          <a:prstGeom prst="roundRect">
+            <a:avLst/>
+          </a:prstGeom>
+          <a:solidFill>
+            <a:srgbClr val="FFFFFF"/>
+          </a:solidFill>
+          <a:ln w="19050">
+            <a:solidFill>
+              <a:srgbClr val="14B8A6"/>
+            </a:solidFill>
+          </a:ln>
+        </p:spPr>
+        <p:style>
+          <a:lnRef idx="1">
+            <a:schemeClr val="accent1"/>
+          </a:lnRef>
+          <a:fillRef idx="3">
+            <a:schemeClr val="accent1"/>
+          </a:fillRef>
+          <a:effectRef idx="2">
+            <a:schemeClr val="accent1"/>
+          </a:effectRef>
+          <a:fontRef idx="minor">
+            <a:schemeClr val="lt1"/>
+          </a:fontRef>
+        </p:style>
+        <p:txBody>
+          <a:bodyPr rtlCol="0" anchor="ctr" lIns="0" tIns="0" rIns="0" bIns="0"/>
+          <a:lstStyle/>
+          <a:p>
+            <a:pPr algn="ctr">
+              <a:defRPr sz="950" b="1">
+                <a:solidFill>
+                  <a:srgbClr val="0D9488"/>
+                </a:solidFill>
+                <a:latin typeface="Arial"/>
+              </a:defRPr>
+            </a:pPr>
+            <a:r>
+              <a:t>MINIMUM VIABLE DEMO</a:t>
+            </a:r>
+          </a:p>
+        </p:txBody>
+      </p:sp>
+      <p:sp>
+        <p:nvSpPr>
+          <p:cNvPr id="9" name="TextBox 8"/>
           <p:cNvSpPr txBox="1"/>
           <p:nvPr/>
         </p:nvSpPr>
         <p:spPr>
           <a:xfrm>
-            <a:off x="914400" y="2057400"/>
-            <a:ext cx="3749040" cy="3200400"/>
+            <a:off x="960120" y="2496311"/>
+            <a:ext cx="3931920" cy="2670048"/>
           </a:xfrm>
           <a:prstGeom prst="rect">
             <a:avLst/>
@@ -6507,144 +6996,91 @@
           <a:noFill/>
         </p:spPr>
         <p:txBody>
-          <a:bodyPr wrap="square">
+          <a:bodyPr wrap="square" lIns="0" tIns="0" rIns="0" bIns="0">
             <a:spAutoFit/>
           </a:bodyPr>
           <a:lstStyle/>
           <a:p>
             <a:pPr>
-              <a:defRPr sz="1000" b="1">
-                <a:solidFill>
-                  <a:srgbClr val="0D9488"/>
+              <a:defRPr sz="1150">
+                <a:solidFill>
+                  <a:srgbClr val="1E293B"/>
                 </a:solidFill>
                 <a:latin typeface="Arial"/>
               </a:defRPr>
             </a:pPr>
             <a:r>
-              <a:t>MINIMUM VIABLE DEMO (BUILT &amp; READY)</a:t>
-            </a:r>
-          </a:p>
-          <a:p>
-            <a:pPr>
-              <a:spcAft>
-                <a:spcPts val="300"/>
-              </a:spcAft>
-              <a:defRPr sz="1100">
-                <a:solidFill>
-                  <a:srgbClr val="1E293B"/>
-                </a:solidFill>
-                <a:latin typeface="Arial"/>
-              </a:defRPr>
-            </a:pPr>
-            <a:r>
-              <a:t>Upload any phishing .eml email file:</a:t>
-            </a:r>
-          </a:p>
-          <a:p>
-            <a:pPr>
-              <a:spcAft>
-                <a:spcPts val="300"/>
-              </a:spcAft>
-              <a:defRPr sz="1100">
-                <a:solidFill>
-                  <a:srgbClr val="1E293B"/>
-                </a:solidFill>
-                <a:latin typeface="Arial"/>
-              </a:defRPr>
-            </a:pPr>
-          </a:p>
-          <a:p>
-            <a:pPr>
-              <a:spcAft>
-                <a:spcPts val="300"/>
-              </a:spcAft>
-              <a:defRPr sz="1100">
-                <a:solidFill>
-                  <a:srgbClr val="1E293B"/>
-                </a:solidFill>
-                <a:latin typeface="Arial"/>
-              </a:defRPr>
-            </a:pPr>
-            <a:r>
-              <a:t>✅ 0-100 Risk Score with explainable reasons</a:t>
-            </a:r>
-          </a:p>
-          <a:p>
-            <a:pPr>
-              <a:spcAft>
-                <a:spcPts val="300"/>
-              </a:spcAft>
-              <a:defRPr sz="1100">
-                <a:solidFill>
-                  <a:srgbClr val="1E293B"/>
-                </a:solidFill>
-                <a:latin typeface="Arial"/>
-              </a:defRPr>
-            </a:pPr>
-            <a:r>
-              <a:t>✅ Hop-by-Hop MTA relay geolocation trace map</a:t>
-            </a:r>
-          </a:p>
-          <a:p>
-            <a:pPr>
-              <a:spcAft>
-                <a:spcPts val="300"/>
-              </a:spcAft>
-              <a:defRPr sz="1100">
-                <a:solidFill>
-                  <a:srgbClr val="1E293B"/>
-                </a:solidFill>
-                <a:latin typeface="Arial"/>
-              </a:defRPr>
-            </a:pPr>
-            <a:r>
-              <a:t>✅ 5-Model Open-Source LLM Consensus verdict</a:t>
-            </a:r>
-          </a:p>
-          <a:p>
-            <a:pPr>
-              <a:spcAft>
-                <a:spcPts val="300"/>
-              </a:spcAft>
-              <a:defRPr sz="1100">
-                <a:solidFill>
-                  <a:srgbClr val="1E293B"/>
-                </a:solidFill>
-                <a:latin typeface="Arial"/>
-              </a:defRPr>
-            </a:pPr>
-            <a:r>
-              <a:t>✅ Interactive AI SOC Co-Pilot &amp; prompt sandbox</a:t>
-            </a:r>
-          </a:p>
-          <a:p>
-            <a:pPr>
-              <a:spcAft>
-                <a:spcPts val="300"/>
-              </a:spcAft>
-              <a:defRPr sz="1100">
-                <a:solidFill>
-                  <a:srgbClr val="1E293B"/>
-                </a:solidFill>
-                <a:latin typeface="Arial"/>
-              </a:defRPr>
-            </a:pPr>
-            <a:r>
-              <a:t>✅ Cryptographically hashed, court-ready PDF report</a:t>
-            </a:r>
-          </a:p>
-        </p:txBody>
-      </p:sp>
-      <p:sp>
-        <p:nvSpPr>
-          <p:cNvPr id="9" name="Oval 8"/>
+              <a:t>Upload a phishing .eml:</a:t>
+            </a:r>
+            <a:br/>
+            <a:br/>
+            <a:r>
+              <a:t>risk score with reasons,</a:t>
+            </a:r>
+            <a:br/>
+            <a:r>
+              <a:t>relay trace map,</a:t>
+            </a:r>
+            <a:br/>
+            <a:r>
+              <a:t>hashed forensic PDF.</a:t>
+            </a:r>
+          </a:p>
+        </p:txBody>
+      </p:sp>
+      <p:sp>
+        <p:nvSpPr>
+          <p:cNvPr id="10" name="Rectangle 9"/>
           <p:cNvSpPr/>
           <p:nvPr/>
         </p:nvSpPr>
         <p:spPr>
           <a:xfrm>
-            <a:off x="5120640" y="2011680"/>
-            <a:ext cx="502920" cy="502920"/>
+            <a:off x="5532120" y="2194560"/>
+            <a:ext cx="36576" cy="2377440"/>
+          </a:xfrm>
+          <a:prstGeom prst="rect">
+            <a:avLst/>
+          </a:prstGeom>
+          <a:solidFill>
+            <a:srgbClr val="14B8A6"/>
+          </a:solidFill>
+          <a:ln>
+            <a:noFill/>
+          </a:ln>
+        </p:spPr>
+        <p:style>
+          <a:lnRef idx="1">
+            <a:schemeClr val="accent1"/>
+          </a:lnRef>
+          <a:fillRef idx="3">
+            <a:schemeClr val="accent1"/>
+          </a:fillRef>
+          <a:effectRef idx="2">
+            <a:schemeClr val="accent1"/>
+          </a:effectRef>
+          <a:fontRef idx="minor">
+            <a:schemeClr val="lt1"/>
+          </a:fontRef>
+        </p:style>
+        <p:txBody>
+          <a:bodyPr rtlCol="0" anchor="ctr"/>
+          <a:lstStyle/>
+          <a:p>
+            <a:pPr algn="ctr"/>
+          </a:p>
+        </p:txBody>
+      </p:sp>
+      <p:sp>
+        <p:nvSpPr>
+          <p:cNvPr id="11" name="Oval 10"/>
+          <p:cNvSpPr/>
+          <p:nvPr/>
+        </p:nvSpPr>
+        <p:spPr>
+          <a:xfrm>
+            <a:off x="5321808" y="1965960"/>
+            <a:ext cx="457200" cy="457200"/>
           </a:xfrm>
           <a:prstGeom prst="ellipse">
             <a:avLst/>
@@ -6671,14 +7107,15 @@
           </a:fontRef>
         </p:style>
         <p:txBody>
-          <a:bodyPr rtlCol="0" anchor="ctr"/>
+          <a:bodyPr rtlCol="0" anchor="ctr" lIns="0" tIns="0" rIns="0" bIns="0"/>
           <a:lstStyle/>
           <a:p>
             <a:pPr algn="ctr">
-              <a:defRPr b="1" sz="1300">
+              <a:defRPr sz="1100" b="1">
                 <a:solidFill>
                   <a:srgbClr val="FFFFFF"/>
                 </a:solidFill>
+                <a:latin typeface="Arial Black"/>
               </a:defRPr>
             </a:pPr>
             <a:r>
@@ -6689,14 +7126,14 @@
       </p:sp>
       <p:sp>
         <p:nvSpPr>
-          <p:cNvPr id="10" name="TextBox 9"/>
+          <p:cNvPr id="12" name="TextBox 11"/>
           <p:cNvSpPr txBox="1"/>
           <p:nvPr/>
         </p:nvSpPr>
         <p:spPr>
           <a:xfrm>
-            <a:off x="5760720" y="1920240"/>
-            <a:ext cx="5669280" cy="1005840"/>
+            <a:off x="5943600" y="1920240"/>
+            <a:ext cx="5486400" cy="868680"/>
           </a:xfrm>
           <a:prstGeom prst="rect">
             <a:avLst/>
@@ -6704,48 +7141,51 @@
           <a:noFill/>
         </p:spPr>
         <p:txBody>
-          <a:bodyPr wrap="square">
+          <a:bodyPr wrap="square" lIns="0" tIns="0" rIns="0" bIns="0">
             <a:spAutoFit/>
           </a:bodyPr>
           <a:lstStyle/>
           <a:p>
             <a:pPr>
-              <a:defRPr sz="1200" b="1">
+              <a:spcAft>
+                <a:spcPts val="200"/>
+              </a:spcAft>
+              <a:defRPr sz="1150" b="1">
                 <a:solidFill>
                   <a:srgbClr val="0D9488"/>
                 </a:solidFill>
+                <a:latin typeface="Arial Black"/>
+              </a:defRPr>
+            </a:pPr>
+            <a:r>
+              <a:t>MILESTONE 01 (MORNING)</a:t>
+            </a:r>
+          </a:p>
+          <a:p>
+            <a:pPr>
+              <a:defRPr sz="1100">
+                <a:solidFill>
+                  <a:srgbClr val="1E293B"/>
+                </a:solidFill>
                 <a:latin typeface="Arial"/>
               </a:defRPr>
             </a:pPr>
             <a:r>
-              <a:t>MILESTONE 01 (MORNING) — COMPLETE</a:t>
-            </a:r>
-          </a:p>
-          <a:p>
-            <a:pPr>
-              <a:defRPr sz="1050">
-                <a:solidFill>
-                  <a:srgbClr val="1E293B"/>
-                </a:solidFill>
-                <a:latin typeface="Arial"/>
-              </a:defRPr>
-            </a:pPr>
-            <a:r>
-              <a:t>FastAPI setup, RFC 822 .eml parser, SPF/DKIM/DMARC checks, IP Geolocation caching, and baseline deterministic threat engine.</a:t>
-            </a:r>
-          </a:p>
-        </p:txBody>
-      </p:sp>
-      <p:sp>
-        <p:nvSpPr>
-          <p:cNvPr id="11" name="Oval 10"/>
+              <a:t>FastAPI setup, .eml parser, SPF/DKIM/DMARC checks, GeoLite2, baseline LightGBM model.</a:t>
+            </a:r>
+          </a:p>
+        </p:txBody>
+      </p:sp>
+      <p:sp>
+        <p:nvSpPr>
+          <p:cNvPr id="13" name="Oval 12"/>
           <p:cNvSpPr/>
           <p:nvPr/>
         </p:nvSpPr>
         <p:spPr>
           <a:xfrm>
-            <a:off x="5120640" y="3154680"/>
-            <a:ext cx="502920" cy="502920"/>
+            <a:off x="5321808" y="2971800"/>
+            <a:ext cx="457200" cy="457200"/>
           </a:xfrm>
           <a:prstGeom prst="ellipse">
             <a:avLst/>
@@ -6772,14 +7212,15 @@
           </a:fontRef>
         </p:style>
         <p:txBody>
-          <a:bodyPr rtlCol="0" anchor="ctr"/>
+          <a:bodyPr rtlCol="0" anchor="ctr" lIns="0" tIns="0" rIns="0" bIns="0"/>
           <a:lstStyle/>
           <a:p>
             <a:pPr algn="ctr">
-              <a:defRPr b="1" sz="1300">
+              <a:defRPr sz="1100" b="1">
                 <a:solidFill>
                   <a:srgbClr val="FFFFFF"/>
                 </a:solidFill>
+                <a:latin typeface="Arial Black"/>
               </a:defRPr>
             </a:pPr>
             <a:r>
@@ -6790,14 +7231,14 @@
       </p:sp>
       <p:sp>
         <p:nvSpPr>
-          <p:cNvPr id="12" name="TextBox 11"/>
+          <p:cNvPr id="14" name="TextBox 13"/>
           <p:cNvSpPr txBox="1"/>
           <p:nvPr/>
         </p:nvSpPr>
         <p:spPr>
           <a:xfrm>
-            <a:off x="5760720" y="3063240"/>
-            <a:ext cx="5669280" cy="1005840"/>
+            <a:off x="5943600" y="2926080"/>
+            <a:ext cx="5486400" cy="868680"/>
           </a:xfrm>
           <a:prstGeom prst="rect">
             <a:avLst/>
@@ -6805,48 +7246,51 @@
           <a:noFill/>
         </p:spPr>
         <p:txBody>
-          <a:bodyPr wrap="square">
+          <a:bodyPr wrap="square" lIns="0" tIns="0" rIns="0" bIns="0">
             <a:spAutoFit/>
           </a:bodyPr>
           <a:lstStyle/>
           <a:p>
             <a:pPr>
-              <a:defRPr sz="1200" b="1">
+              <a:spcAft>
+                <a:spcPts val="200"/>
+              </a:spcAft>
+              <a:defRPr sz="1150" b="1">
                 <a:solidFill>
                   <a:srgbClr val="0D9488"/>
                 </a:solidFill>
+                <a:latin typeface="Arial Black"/>
+              </a:defRPr>
+            </a:pPr>
+            <a:r>
+              <a:t>MILESTONE 02 (AFTERNOON)</a:t>
+            </a:r>
+          </a:p>
+          <a:p>
+            <a:pPr>
+              <a:defRPr sz="1100">
+                <a:solidFill>
+                  <a:srgbClr val="1E293B"/>
+                </a:solidFill>
                 <a:latin typeface="Arial"/>
               </a:defRPr>
             </a:pPr>
             <a:r>
-              <a:t>MILESTONE 02 (AFTERNOON) — COMPLETE</a:t>
-            </a:r>
-          </a:p>
-          <a:p>
-            <a:pPr>
-              <a:defRPr sz="1050">
-                <a:solidFill>
-                  <a:srgbClr val="1E293B"/>
-                </a:solidFill>
-                <a:latin typeface="Arial"/>
-              </a:defRPr>
-            </a:pPr>
-            <a:r>
-              <a:t>Trust-boundary logic, hop latency calculation, NVIDIA NIM integration, multi-model consensus, and SHA-256 evidence vault.</a:t>
-            </a:r>
-          </a:p>
-        </p:txBody>
-      </p:sp>
-      <p:sp>
-        <p:nvSpPr>
-          <p:cNvPr id="13" name="Oval 12"/>
+              <a:t>Trust-boundary logic, geo-confidence, local LLM intent extraction, hashed evidence log.</a:t>
+            </a:r>
+          </a:p>
+        </p:txBody>
+      </p:sp>
+      <p:sp>
+        <p:nvSpPr>
+          <p:cNvPr id="15" name="Oval 14"/>
           <p:cNvSpPr/>
           <p:nvPr/>
         </p:nvSpPr>
         <p:spPr>
           <a:xfrm>
-            <a:off x="5120640" y="4297679"/>
-            <a:ext cx="502920" cy="502920"/>
+            <a:off x="5321808" y="3977640"/>
+            <a:ext cx="457200" cy="457200"/>
           </a:xfrm>
           <a:prstGeom prst="ellipse">
             <a:avLst/>
@@ -6873,14 +7317,15 @@
           </a:fontRef>
         </p:style>
         <p:txBody>
-          <a:bodyPr rtlCol="0" anchor="ctr"/>
+          <a:bodyPr rtlCol="0" anchor="ctr" lIns="0" tIns="0" rIns="0" bIns="0"/>
           <a:lstStyle/>
           <a:p>
             <a:pPr algn="ctr">
-              <a:defRPr b="1" sz="1300">
+              <a:defRPr sz="1100" b="1">
                 <a:solidFill>
                   <a:srgbClr val="FFFFFF"/>
                 </a:solidFill>
+                <a:latin typeface="Arial Black"/>
               </a:defRPr>
             </a:pPr>
             <a:r>
@@ -6891,14 +7336,14 @@
       </p:sp>
       <p:sp>
         <p:nvSpPr>
-          <p:cNvPr id="14" name="TextBox 13"/>
+          <p:cNvPr id="16" name="TextBox 15"/>
           <p:cNvSpPr txBox="1"/>
           <p:nvPr/>
         </p:nvSpPr>
         <p:spPr>
           <a:xfrm>
-            <a:off x="5760720" y="4206240"/>
-            <a:ext cx="5669280" cy="1005840"/>
+            <a:off x="5943600" y="3931920"/>
+            <a:ext cx="5486400" cy="868680"/>
           </a:xfrm>
           <a:prstGeom prst="rect">
             <a:avLst/>
@@ -6906,58 +7351,61 @@
           <a:noFill/>
         </p:spPr>
         <p:txBody>
-          <a:bodyPr wrap="square">
+          <a:bodyPr wrap="square" lIns="0" tIns="0" rIns="0" bIns="0">
             <a:spAutoFit/>
           </a:bodyPr>
           <a:lstStyle/>
           <a:p>
             <a:pPr>
-              <a:defRPr sz="1200" b="1">
+              <a:spcAft>
+                <a:spcPts val="200"/>
+              </a:spcAft>
+              <a:defRPr sz="1150" b="1">
                 <a:solidFill>
                   <a:srgbClr val="0D9488"/>
                 </a:solidFill>
+                <a:latin typeface="Arial Black"/>
+              </a:defRPr>
+            </a:pPr>
+            <a:r>
+              <a:t>MILESTONE 03 (EVENING)</a:t>
+            </a:r>
+          </a:p>
+          <a:p>
+            <a:pPr>
+              <a:defRPr sz="1100">
+                <a:solidFill>
+                  <a:srgbClr val="1E293B"/>
+                </a:solidFill>
                 <a:latin typeface="Arial"/>
               </a:defRPr>
             </a:pPr>
             <a:r>
-              <a:t>MILESTONE 03 (EVENING) — COMPLETE</a:t>
-            </a:r>
-          </a:p>
-          <a:p>
-            <a:pPr>
-              <a:defRPr sz="1050">
-                <a:solidFill>
-                  <a:srgbClr val="1E293B"/>
-                </a:solidFill>
-                <a:latin typeface="Arial"/>
-              </a:defRPr>
-            </a:pPr>
-            <a:r>
-              <a:t>React 18 + Vite dashboard, Leaflet interactive threat map, AI Co-Pilot chat, PDF export, 11/11 automated tests passing, cloud deploy ready.</a:t>
-            </a:r>
-          </a:p>
-        </p:txBody>
-      </p:sp>
-      <p:sp>
-        <p:nvSpPr>
-          <p:cNvPr id="15" name="Rounded Rectangle 14"/>
+              <a:t>React dashboard (risk gauge, trace map), PDF report, edge-case tests, pitch rehearsal.</a:t>
+            </a:r>
+          </a:p>
+        </p:txBody>
+      </p:sp>
+      <p:sp>
+        <p:nvSpPr>
+          <p:cNvPr id="17" name="Rounded Rectangle 16"/>
           <p:cNvSpPr/>
           <p:nvPr/>
         </p:nvSpPr>
         <p:spPr>
           <a:xfrm>
-            <a:off x="731520" y="5532120"/>
-            <a:ext cx="10728655" cy="685800"/>
+            <a:off x="731520" y="5440680"/>
+            <a:ext cx="10728655" cy="777240"/>
           </a:xfrm>
           <a:prstGeom prst="roundRect">
             <a:avLst/>
           </a:prstGeom>
           <a:solidFill>
-            <a:srgbClr val="FFF7ED"/>
+            <a:srgbClr val="FFFFFF"/>
           </a:solidFill>
           <a:ln w="19050">
             <a:solidFill>
-              <a:srgbClr val="FDBA74"/>
+              <a:srgbClr val="FB923C"/>
             </a:solidFill>
           </a:ln>
         </p:spPr>
@@ -6985,14 +7433,69 @@
       </p:sp>
       <p:sp>
         <p:nvSpPr>
-          <p:cNvPr id="16" name="TextBox 15"/>
+          <p:cNvPr id="18" name="Rounded Rectangle 17"/>
+          <p:cNvSpPr/>
+          <p:nvPr/>
+        </p:nvSpPr>
+        <p:spPr>
+          <a:xfrm>
+            <a:off x="960120" y="5669280"/>
+            <a:ext cx="1645920" cy="320040"/>
+          </a:xfrm>
+          <a:prstGeom prst="roundRect">
+            <a:avLst/>
+          </a:prstGeom>
+          <a:solidFill>
+            <a:srgbClr val="FFFFFF"/>
+          </a:solidFill>
+          <a:ln w="19050">
+            <a:solidFill>
+              <a:srgbClr val="EA580C"/>
+            </a:solidFill>
+          </a:ln>
+        </p:spPr>
+        <p:style>
+          <a:lnRef idx="1">
+            <a:schemeClr val="accent1"/>
+          </a:lnRef>
+          <a:fillRef idx="3">
+            <a:schemeClr val="accent1"/>
+          </a:fillRef>
+          <a:effectRef idx="2">
+            <a:schemeClr val="accent1"/>
+          </a:effectRef>
+          <a:fontRef idx="minor">
+            <a:schemeClr val="lt1"/>
+          </a:fontRef>
+        </p:style>
+        <p:txBody>
+          <a:bodyPr rtlCol="0" anchor="ctr" lIns="0" tIns="0" rIns="0" bIns="0"/>
+          <a:lstStyle/>
+          <a:p>
+            <a:pPr algn="ctr">
+              <a:defRPr sz="950" b="1">
+                <a:solidFill>
+                  <a:srgbClr val="EA580C"/>
+                </a:solidFill>
+                <a:latin typeface="Arial"/>
+              </a:defRPr>
+            </a:pPr>
+            <a:r>
+              <a:t>FEEDBACK PLAN</a:t>
+            </a:r>
+          </a:p>
+        </p:txBody>
+      </p:sp>
+      <p:sp>
+        <p:nvSpPr>
+          <p:cNvPr id="19" name="TextBox 18"/>
           <p:cNvSpPr txBox="1"/>
           <p:nvPr/>
         </p:nvSpPr>
         <p:spPr>
           <a:xfrm>
-            <a:off x="914400" y="5596128"/>
-            <a:ext cx="10332720" cy="548640"/>
+            <a:off x="2834640" y="5596128"/>
+            <a:ext cx="8412480" cy="548640"/>
           </a:xfrm>
           <a:prstGeom prst="rect">
             <a:avLst/>
@@ -7000,26 +7503,21 @@
           <a:noFill/>
         </p:spPr>
         <p:txBody>
-          <a:bodyPr wrap="none">
+          <a:bodyPr wrap="square" lIns="0" tIns="0" rIns="0" bIns="0">
             <a:spAutoFit/>
           </a:bodyPr>
           <a:lstStyle/>
           <a:p>
-            <a:r>
-              <a:rPr b="1" sz="1100">
-                <a:solidFill>
-                  <a:srgbClr val="EA580C"/>
-                </a:solidFill>
-              </a:rPr>
-              <a:t>FEEDBACK &amp; VALIDATION:  </a:t>
-            </a:r>
-            <a:r>
-              <a:rPr sz="1050">
+            <a:pPr>
+              <a:defRPr sz="1100">
                 <a:solidFill>
                   <a:srgbClr val="1E293B"/>
                 </a:solidFill>
-              </a:rPr>
-              <a:t>Zero-latency fallback guarantees demo reliability without cloud dependencies. Tested on 6 realistic enterprise samples (BEC, Scholarship scam, O365 harvest, malicious macro payload, spoofed MTA relay).</a:t>
+                <a:latin typeface="Arial"/>
+              </a:defRPr>
+            </a:pPr>
+            <a:r>
+              <a:t>Backup: rules + LightGBM, offline GeoLite2, sample emails (no LLM, no live lookups). Feedback: test on 10 real .eml samples; 2 mentor reviews.</a:t>
             </a:r>
           </a:p>
         </p:txBody>
@@ -7051,7 +7549,7 @@
         <p:spPr>
           <a:xfrm>
             <a:off x="731520" y="365760"/>
-            <a:ext cx="3657600" cy="640080"/>
+            <a:ext cx="3200400" cy="731520"/>
           </a:xfrm>
           <a:prstGeom prst="rect">
             <a:avLst/>
@@ -7059,21 +7557,34 @@
           <a:noFill/>
         </p:spPr>
         <p:txBody>
-          <a:bodyPr wrap="square">
+          <a:bodyPr wrap="square" lIns="0" tIns="0" rIns="0" bIns="0">
             <a:spAutoFit/>
           </a:bodyPr>
           <a:lstStyle/>
           <a:p>
             <a:pPr>
-              <a:defRPr sz="1300" b="1">
-                <a:solidFill>
-                  <a:srgbClr val="B4141E"/>
+              <a:defRPr sz="1400" b="1">
+                <a:solidFill>
+                  <a:srgbClr val="BE182B"/>
+                </a:solidFill>
+                <a:latin typeface="Arial Black"/>
+              </a:defRPr>
+            </a:pPr>
+            <a:r>
+              <a:t>RAMAIAH</a:t>
+            </a:r>
+          </a:p>
+          <a:p>
+            <a:pPr>
+              <a:defRPr sz="1100">
+                <a:solidFill>
+                  <a:srgbClr val="0F172A"/>
                 </a:solidFill>
                 <a:latin typeface="Arial"/>
               </a:defRPr>
             </a:pPr>
             <a:r>
-              <a:t>RAMAIAH Institute of Technology</a:t>
+              <a:t>Institute of Technology</a:t>
             </a:r>
           </a:p>
         </p:txBody>
@@ -7087,7 +7598,7 @@
         <p:spPr>
           <a:xfrm>
             <a:off x="5120640" y="274320"/>
-            <a:ext cx="2011680" cy="731520"/>
+            <a:ext cx="1950415" cy="822960"/>
           </a:xfrm>
           <a:prstGeom prst="rect">
             <a:avLst/>
@@ -7095,21 +7606,29 @@
           <a:noFill/>
         </p:spPr>
         <p:txBody>
-          <a:bodyPr wrap="none">
+          <a:bodyPr wrap="none" lIns="0" tIns="0" rIns="0" bIns="0">
             <a:spAutoFit/>
           </a:bodyPr>
           <a:lstStyle/>
           <a:p>
-            <a:pPr algn="ctr">
-              <a:defRPr sz="3200" b="1">
-                <a:solidFill>
-                  <a:srgbClr val="EA580C"/>
+            <a:pPr algn="ctr"/>
+            <a:r>
+              <a:rPr sz="3600" b="1">
+                <a:solidFill>
+                  <a:srgbClr val="E73C27"/>
                 </a:solidFill>
                 <a:latin typeface="Arial Black"/>
-              </a:defRPr>
-            </a:pPr>
-            <a:r>
-              <a:t>MLH</a:t>
+              </a:rPr>
+              <a:t>ML</a:t>
+            </a:r>
+            <a:r>
+              <a:rPr sz="3600" b="1">
+                <a:solidFill>
+                  <a:srgbClr val="F59E0B"/>
+                </a:solidFill>
+                <a:latin typeface="Arial Black"/>
+              </a:rPr>
+              <a:t>H</a:t>
             </a:r>
           </a:p>
         </p:txBody>
@@ -7122,8 +7641,8 @@
         </p:nvSpPr>
         <p:spPr>
           <a:xfrm>
-            <a:off x="8412480" y="365760"/>
-            <a:ext cx="3017520" cy="640080"/>
+            <a:off x="8686800" y="365760"/>
+            <a:ext cx="2743200" cy="731520"/>
           </a:xfrm>
           <a:prstGeom prst="rect">
             <a:avLst/>
@@ -7131,21 +7650,34 @@
           <a:noFill/>
         </p:spPr>
         <p:txBody>
-          <a:bodyPr wrap="none">
+          <a:bodyPr wrap="square" lIns="0" tIns="0" rIns="0" bIns="0">
             <a:spAutoFit/>
           </a:bodyPr>
           <a:lstStyle/>
           <a:p>
             <a:pPr algn="r">
-              <a:defRPr sz="1100" b="1">
+              <a:defRPr sz="1200" b="1">
                 <a:solidFill>
                   <a:srgbClr val="0284C7"/>
                 </a:solidFill>
+                <a:latin typeface="Arial Black"/>
+              </a:defRPr>
+            </a:pPr>
+            <a:r>
+              <a:t>IEEE</a:t>
+            </a:r>
+          </a:p>
+          <a:p>
+            <a:pPr algn="r">
+              <a:defRPr sz="1000" b="1">
+                <a:solidFill>
+                  <a:srgbClr val="0F172A"/>
+                </a:solidFill>
                 <a:latin typeface="Arial"/>
               </a:defRPr>
             </a:pPr>
             <a:r>
-              <a:t>IEEE Computational Intelligence Society</a:t>
+              <a:t>Computational Intelligence Society</a:t>
             </a:r>
           </a:p>
         </p:txBody>
@@ -7158,8 +7690,8 @@
         </p:nvSpPr>
         <p:spPr>
           <a:xfrm>
-            <a:off x="731520" y="1051560"/>
-            <a:ext cx="10698480" cy="731520"/>
+            <a:off x="731520" y="1097280"/>
+            <a:ext cx="10728655" cy="685800"/>
           </a:xfrm>
           <a:prstGeom prst="rect">
             <a:avLst/>
@@ -7167,13 +7699,13 @@
           <a:noFill/>
         </p:spPr>
         <p:txBody>
-          <a:bodyPr wrap="none">
+          <a:bodyPr wrap="none" lIns="0" tIns="0" rIns="0" bIns="0">
             <a:spAutoFit/>
           </a:bodyPr>
           <a:lstStyle/>
           <a:p>
             <a:pPr>
-              <a:defRPr sz="2800" b="1">
+              <a:defRPr sz="3200" b="1">
                 <a:solidFill>
                   <a:srgbClr val="0F172A"/>
                 </a:solidFill>
@@ -7194,8 +7726,8 @@
         </p:nvSpPr>
         <p:spPr>
           <a:xfrm>
-            <a:off x="731520" y="6400800"/>
-            <a:ext cx="10698480" cy="320040"/>
+            <a:off x="731520" y="6446520"/>
+            <a:ext cx="10728655" cy="274320"/>
           </a:xfrm>
           <a:prstGeom prst="rect">
             <a:avLst/>
@@ -7203,15 +7735,15 @@
           <a:noFill/>
         </p:spPr>
         <p:txBody>
-          <a:bodyPr wrap="none">
+          <a:bodyPr wrap="none" lIns="0" tIns="0" rIns="0" bIns="0">
             <a:spAutoFit/>
           </a:bodyPr>
           <a:lstStyle/>
           <a:p>
             <a:pPr algn="ctr">
-              <a:defRPr sz="1000">
-                <a:solidFill>
-                  <a:srgbClr val="64748B"/>
+              <a:defRPr sz="1050">
+                <a:solidFill>
+                  <a:srgbClr val="475569"/>
                 </a:solidFill>
                 <a:latin typeface="Arial"/>
               </a:defRPr>
@@ -7230,18 +7762,18 @@
         </p:nvSpPr>
         <p:spPr>
           <a:xfrm>
-            <a:off x="731520" y="1920240"/>
-            <a:ext cx="5166360" cy="2011680"/>
+            <a:off x="731520" y="1874519"/>
+            <a:ext cx="5166360" cy="1371600"/>
           </a:xfrm>
           <a:prstGeom prst="roundRect">
             <a:avLst/>
           </a:prstGeom>
           <a:solidFill>
-            <a:srgbClr val="F8FAFC"/>
+            <a:srgbClr val="FFFFFF"/>
           </a:solidFill>
           <a:ln w="19050">
             <a:solidFill>
-              <a:srgbClr val="CBD5E1"/>
+              <a:srgbClr val="E2E8F0"/>
             </a:solidFill>
           </a:ln>
         </p:spPr>
@@ -7269,108 +7801,24 @@
       </p:sp>
       <p:sp>
         <p:nvSpPr>
-          <p:cNvPr id="8" name="TextBox 7"/>
-          <p:cNvSpPr txBox="1"/>
-          <p:nvPr/>
-        </p:nvSpPr>
-        <p:spPr>
-          <a:xfrm>
-            <a:off x="914400" y="2057400"/>
-            <a:ext cx="4800600" cy="1737360"/>
-          </a:xfrm>
-          <a:prstGeom prst="rect">
-            <a:avLst/>
-          </a:prstGeom>
-          <a:noFill/>
-        </p:spPr>
-        <p:txBody>
-          <a:bodyPr wrap="square">
-            <a:spAutoFit/>
-          </a:bodyPr>
-          <a:lstStyle/>
-          <a:p>
-            <a:pPr>
-              <a:defRPr sz="1000" b="1">
-                <a:solidFill>
-                  <a:srgbClr val="0D9488"/>
-                </a:solidFill>
-                <a:latin typeface="Arial"/>
-              </a:defRPr>
-            </a:pPr>
-            <a:r>
-              <a:t>MEASURABLE IMPACT</a:t>
-            </a:r>
-          </a:p>
-          <a:p>
-            <a:pPr>
-              <a:spcAft>
-                <a:spcPts val="300"/>
-              </a:spcAft>
-              <a:defRPr sz="1100">
-                <a:solidFill>
-                  <a:srgbClr val="1E293B"/>
-                </a:solidFill>
-                <a:latin typeface="Arial"/>
-              </a:defRPr>
-            </a:pPr>
-            <a:r>
-              <a:t>• Benefits enterprise SOC teams, financial fraud units, and student communities.</a:t>
-            </a:r>
-          </a:p>
-          <a:p>
-            <a:pPr>
-              <a:spcAft>
-                <a:spcPts val="300"/>
-              </a:spcAft>
-              <a:defRPr sz="1100">
-                <a:solidFill>
-                  <a:srgbClr val="1E293B"/>
-                </a:solidFill>
-                <a:latin typeface="Arial"/>
-              </a:defRPr>
-            </a:pPr>
-            <a:r>
-              <a:t>• Targets: Precision &gt; 96%, False Positives &lt; 1.5%, Sub-350ms analysis per email.</a:t>
-            </a:r>
-          </a:p>
-          <a:p>
-            <a:pPr>
-              <a:spcAft>
-                <a:spcPts val="300"/>
-              </a:spcAft>
-              <a:defRPr sz="1100">
-                <a:solidFill>
-                  <a:srgbClr val="1E293B"/>
-                </a:solidFill>
-                <a:latin typeface="Arial"/>
-              </a:defRPr>
-            </a:pPr>
-            <a:r>
-              <a:t>• Slashes manual phishing triage time from 30 minutes to under 5 seconds.</a:t>
-            </a:r>
-          </a:p>
-        </p:txBody>
-      </p:sp>
-      <p:sp>
-        <p:nvSpPr>
-          <p:cNvPr id="9" name="Rounded Rectangle 8"/>
+          <p:cNvPr id="8" name="Rounded Rectangle 7"/>
           <p:cNvSpPr/>
           <p:nvPr/>
         </p:nvSpPr>
         <p:spPr>
           <a:xfrm>
-            <a:off x="6263640" y="1920240"/>
-            <a:ext cx="5166360" cy="2011680"/>
+            <a:off x="960120" y="2075687"/>
+            <a:ext cx="2167128" cy="320040"/>
           </a:xfrm>
           <a:prstGeom prst="roundRect">
             <a:avLst/>
           </a:prstGeom>
           <a:solidFill>
-            <a:srgbClr val="F8FAFC"/>
+            <a:srgbClr val="FFFFFF"/>
           </a:solidFill>
           <a:ln w="19050">
             <a:solidFill>
-              <a:srgbClr val="CBD5E1"/>
+              <a:srgbClr val="14B8A6"/>
             </a:solidFill>
           </a:ln>
         </p:spPr>
@@ -7389,23 +7837,33 @@
           </a:fontRef>
         </p:style>
         <p:txBody>
-          <a:bodyPr rtlCol="0" anchor="ctr"/>
-          <a:lstStyle/>
-          <a:p>
-            <a:pPr algn="ctr"/>
-          </a:p>
-        </p:txBody>
-      </p:sp>
-      <p:sp>
-        <p:nvSpPr>
-          <p:cNvPr id="10" name="TextBox 9"/>
+          <a:bodyPr rtlCol="0" anchor="ctr" lIns="0" tIns="0" rIns="0" bIns="0"/>
+          <a:lstStyle/>
+          <a:p>
+            <a:pPr algn="ctr">
+              <a:defRPr sz="950" b="1">
+                <a:solidFill>
+                  <a:srgbClr val="0D9488"/>
+                </a:solidFill>
+                <a:latin typeface="Arial"/>
+              </a:defRPr>
+            </a:pPr>
+            <a:r>
+              <a:t>MEASURABLE IMPACT</a:t>
+            </a:r>
+          </a:p>
+        </p:txBody>
+      </p:sp>
+      <p:sp>
+        <p:nvSpPr>
+          <p:cNvPr id="9" name="TextBox 8"/>
           <p:cNvSpPr txBox="1"/>
           <p:nvPr/>
         </p:nvSpPr>
         <p:spPr>
           <a:xfrm>
-            <a:off x="6446520" y="2057400"/>
-            <a:ext cx="4800600" cy="1737360"/>
+            <a:off x="960120" y="2496311"/>
+            <a:ext cx="4709160" cy="658368"/>
           </a:xfrm>
           <a:prstGeom prst="rect">
             <a:avLst/>
@@ -7413,109 +7871,45 @@
           <a:noFill/>
         </p:spPr>
         <p:txBody>
-          <a:bodyPr wrap="square">
+          <a:bodyPr wrap="square" lIns="0" tIns="0" rIns="0" bIns="0">
             <a:spAutoFit/>
           </a:bodyPr>
           <a:lstStyle/>
           <a:p>
             <a:pPr>
-              <a:defRPr sz="1000" b="1">
-                <a:solidFill>
-                  <a:srgbClr val="0D9488"/>
+              <a:defRPr sz="1150">
+                <a:solidFill>
+                  <a:srgbClr val="1E293B"/>
                 </a:solidFill>
                 <a:latin typeface="Arial"/>
               </a:defRPr>
             </a:pPr>
             <a:r>
-              <a:t>ETHICS &amp; SAFETY</a:t>
-            </a:r>
-          </a:p>
-          <a:p>
-            <a:pPr>
-              <a:spcAft>
-                <a:spcPts val="300"/>
-              </a:spcAft>
-              <a:defRPr sz="1100">
-                <a:solidFill>
-                  <a:srgbClr val="1E293B"/>
-                </a:solidFill>
-                <a:latin typeface="Arial"/>
-              </a:defRPr>
-            </a:pPr>
-            <a:r>
-              <a:t>• Privacy: Ephemeral processing, zero cloud data retention, PII redaction.</a:t>
-            </a:r>
-          </a:p>
-          <a:p>
-            <a:pPr>
-              <a:spcAft>
-                <a:spcPts val="300"/>
-              </a:spcAft>
-              <a:defRPr sz="1100">
-                <a:solidFill>
-                  <a:srgbClr val="1E293B"/>
-                </a:solidFill>
-                <a:latin typeface="Arial"/>
-              </a:defRPr>
-            </a:pPr>
-            <a:r>
-              <a:t>• Guardrails: LLM outputs strictly anchored to RFC 822 cryptographic headers.</a:t>
-            </a:r>
-          </a:p>
-          <a:p>
-            <a:pPr>
-              <a:spcAft>
-                <a:spcPts val="300"/>
-              </a:spcAft>
-              <a:defRPr sz="1100">
-                <a:solidFill>
-                  <a:srgbClr val="1E293B"/>
-                </a:solidFill>
-                <a:latin typeface="Arial"/>
-              </a:defRPr>
-            </a:pPr>
-            <a:r>
-              <a:t>• Confidence Scoring: Objective probabilistic indicators rather than false attribution.</a:t>
-            </a:r>
-          </a:p>
-          <a:p>
-            <a:pPr>
-              <a:spcAft>
-                <a:spcPts val="300"/>
-              </a:spcAft>
-              <a:defRPr sz="1100">
-                <a:solidFill>
-                  <a:srgbClr val="1E293B"/>
-                </a:solidFill>
-                <a:latin typeface="Arial"/>
-              </a:defRPr>
-            </a:pPr>
-            <a:r>
-              <a:t>• Human-in-the-Loop: AI Co-Pilot provides explainable advice; human analyst confirms.</a:t>
-            </a:r>
-          </a:p>
-        </p:txBody>
-      </p:sp>
-      <p:sp>
-        <p:nvSpPr>
-          <p:cNvPr id="11" name="Rounded Rectangle 10"/>
+              <a:t>Benefits banks, institutions and response teams. Targets: precision &gt;90%, false positives &lt;2%, &lt;5 s per email.</a:t>
+            </a:r>
+          </a:p>
+        </p:txBody>
+      </p:sp>
+      <p:sp>
+        <p:nvSpPr>
+          <p:cNvPr id="10" name="Rounded Rectangle 9"/>
           <p:cNvSpPr/>
           <p:nvPr/>
         </p:nvSpPr>
         <p:spPr>
           <a:xfrm>
-            <a:off x="731520" y="4160520"/>
-            <a:ext cx="5166360" cy="2011680"/>
+            <a:off x="731520" y="3383280"/>
+            <a:ext cx="5166360" cy="1371600"/>
           </a:xfrm>
           <a:prstGeom prst="roundRect">
             <a:avLst/>
           </a:prstGeom>
           <a:solidFill>
-            <a:srgbClr val="F8FAFC"/>
+            <a:srgbClr val="FFFFFF"/>
           </a:solidFill>
           <a:ln w="19050">
             <a:solidFill>
-              <a:srgbClr val="CBD5E1"/>
+              <a:srgbClr val="E2E8F0"/>
             </a:solidFill>
           </a:ln>
         </p:spPr>
@@ -7543,108 +7937,24 @@
       </p:sp>
       <p:sp>
         <p:nvSpPr>
-          <p:cNvPr id="12" name="TextBox 11"/>
-          <p:cNvSpPr txBox="1"/>
-          <p:nvPr/>
-        </p:nvSpPr>
-        <p:spPr>
-          <a:xfrm>
-            <a:off x="914400" y="4297680"/>
-            <a:ext cx="4800600" cy="1737360"/>
-          </a:xfrm>
-          <a:prstGeom prst="rect">
-            <a:avLst/>
-          </a:prstGeom>
-          <a:noFill/>
-        </p:spPr>
-        <p:txBody>
-          <a:bodyPr wrap="square">
-            <a:spAutoFit/>
-          </a:bodyPr>
-          <a:lstStyle/>
-          <a:p>
-            <a:pPr>
-              <a:defRPr sz="1000" b="1">
-                <a:solidFill>
-                  <a:srgbClr val="0D9488"/>
-                </a:solidFill>
-                <a:latin typeface="Arial"/>
-              </a:defRPr>
-            </a:pPr>
-            <a:r>
-              <a:t>OPEN-SOURCE CONTRIBUTION</a:t>
-            </a:r>
-          </a:p>
-          <a:p>
-            <a:pPr>
-              <a:spcAft>
-                <a:spcPts val="300"/>
-              </a:spcAft>
-              <a:defRPr sz="1100">
-                <a:solidFill>
-                  <a:srgbClr val="1E293B"/>
-                </a:solidFill>
-                <a:latin typeface="Arial"/>
-              </a:defRPr>
-            </a:pPr>
-            <a:r>
-              <a:t>• Public MIT Licensed Repository: github.com/2007JAYANTHYT/PHISHTRACE</a:t>
-            </a:r>
-          </a:p>
-          <a:p>
-            <a:pPr>
-              <a:spcAft>
-                <a:spcPts val="300"/>
-              </a:spcAft>
-              <a:defRPr sz="1100">
-                <a:solidFill>
-                  <a:srgbClr val="1E293B"/>
-                </a:solidFill>
-                <a:latin typeface="Arial"/>
-              </a:defRPr>
-            </a:pPr>
-            <a:r>
-              <a:t>• Fully documented architecture, roadmap, API schemas, and sample attack vectors.</a:t>
-            </a:r>
-          </a:p>
-          <a:p>
-            <a:pPr>
-              <a:spcAft>
-                <a:spcPts val="300"/>
-              </a:spcAft>
-              <a:defRPr sz="1100">
-                <a:solidFill>
-                  <a:srgbClr val="1E293B"/>
-                </a:solidFill>
-                <a:latin typeface="Arial"/>
-              </a:defRPr>
-            </a:pPr>
-            <a:r>
-              <a:t>• 1-click cloud deployment blueprints for Vercel and Render.</a:t>
-            </a:r>
-          </a:p>
-        </p:txBody>
-      </p:sp>
-      <p:sp>
-        <p:nvSpPr>
-          <p:cNvPr id="13" name="Rounded Rectangle 12"/>
+          <p:cNvPr id="11" name="Rounded Rectangle 10"/>
           <p:cNvSpPr/>
           <p:nvPr/>
         </p:nvSpPr>
         <p:spPr>
           <a:xfrm>
-            <a:off x="6263640" y="4160520"/>
-            <a:ext cx="5166360" cy="2011680"/>
+            <a:off x="960120" y="3584448"/>
+            <a:ext cx="2871216" cy="320040"/>
           </a:xfrm>
           <a:prstGeom prst="roundRect">
             <a:avLst/>
           </a:prstGeom>
           <a:solidFill>
-            <a:srgbClr val="F8FAFC"/>
+            <a:srgbClr val="FFFFFF"/>
           </a:solidFill>
           <a:ln w="19050">
             <a:solidFill>
-              <a:srgbClr val="CBD5E1"/>
+              <a:srgbClr val="14B8A6"/>
             </a:solidFill>
           </a:ln>
         </p:spPr>
@@ -7663,23 +7973,33 @@
           </a:fontRef>
         </p:style>
         <p:txBody>
-          <a:bodyPr rtlCol="0" anchor="ctr"/>
-          <a:lstStyle/>
-          <a:p>
-            <a:pPr algn="ctr"/>
-          </a:p>
-        </p:txBody>
-      </p:sp>
-      <p:sp>
-        <p:nvSpPr>
-          <p:cNvPr id="14" name="TextBox 13"/>
+          <a:bodyPr rtlCol="0" anchor="ctr" lIns="0" tIns="0" rIns="0" bIns="0"/>
+          <a:lstStyle/>
+          <a:p>
+            <a:pPr algn="ctr">
+              <a:defRPr sz="950" b="1">
+                <a:solidFill>
+                  <a:srgbClr val="0D9488"/>
+                </a:solidFill>
+                <a:latin typeface="Arial"/>
+              </a:defRPr>
+            </a:pPr>
+            <a:r>
+              <a:t>OPEN-SOURCE CONTRIBUTION</a:t>
+            </a:r>
+          </a:p>
+        </p:txBody>
+      </p:sp>
+      <p:sp>
+        <p:nvSpPr>
+          <p:cNvPr id="12" name="TextBox 11"/>
           <p:cNvSpPr txBox="1"/>
           <p:nvPr/>
         </p:nvSpPr>
         <p:spPr>
           <a:xfrm>
-            <a:off x="6446520" y="4297680"/>
-            <a:ext cx="4800600" cy="1737360"/>
+            <a:off x="960120" y="4005072"/>
+            <a:ext cx="4709160" cy="658368"/>
           </a:xfrm>
           <a:prstGeom prst="rect">
             <a:avLst/>
@@ -7687,13 +8007,113 @@
           <a:noFill/>
         </p:spPr>
         <p:txBody>
-          <a:bodyPr wrap="square">
+          <a:bodyPr wrap="square" lIns="0" tIns="0" rIns="0" bIns="0">
             <a:spAutoFit/>
           </a:bodyPr>
           <a:lstStyle/>
           <a:p>
             <a:pPr>
-              <a:defRPr sz="1000" b="1">
+              <a:defRPr sz="1150">
+                <a:solidFill>
+                  <a:srgbClr val="1E293B"/>
+                </a:solidFill>
+                <a:latin typeface="Arial"/>
+              </a:defRPr>
+            </a:pPr>
+            <a:r>
+              <a:t>Public MIT/Apache-2.0 repo with roadmap, README, sample .eml set and contribution guide.</a:t>
+            </a:r>
+          </a:p>
+        </p:txBody>
+      </p:sp>
+      <p:sp>
+        <p:nvSpPr>
+          <p:cNvPr id="13" name="Rounded Rectangle 12"/>
+          <p:cNvSpPr/>
+          <p:nvPr/>
+        </p:nvSpPr>
+        <p:spPr>
+          <a:xfrm>
+            <a:off x="731520" y="4892040"/>
+            <a:ext cx="5166360" cy="1371600"/>
+          </a:xfrm>
+          <a:prstGeom prst="roundRect">
+            <a:avLst/>
+          </a:prstGeom>
+          <a:solidFill>
+            <a:srgbClr val="FFFFFF"/>
+          </a:solidFill>
+          <a:ln w="19050">
+            <a:solidFill>
+              <a:srgbClr val="E2E8F0"/>
+            </a:solidFill>
+          </a:ln>
+        </p:spPr>
+        <p:style>
+          <a:lnRef idx="1">
+            <a:schemeClr val="accent1"/>
+          </a:lnRef>
+          <a:fillRef idx="3">
+            <a:schemeClr val="accent1"/>
+          </a:fillRef>
+          <a:effectRef idx="2">
+            <a:schemeClr val="accent1"/>
+          </a:effectRef>
+          <a:fontRef idx="minor">
+            <a:schemeClr val="lt1"/>
+          </a:fontRef>
+        </p:style>
+        <p:txBody>
+          <a:bodyPr rtlCol="0" anchor="ctr"/>
+          <a:lstStyle/>
+          <a:p>
+            <a:pPr algn="ctr"/>
+          </a:p>
+        </p:txBody>
+      </p:sp>
+      <p:sp>
+        <p:nvSpPr>
+          <p:cNvPr id="14" name="Rounded Rectangle 13"/>
+          <p:cNvSpPr/>
+          <p:nvPr/>
+        </p:nvSpPr>
+        <p:spPr>
+          <a:xfrm>
+            <a:off x="960120" y="5093208"/>
+            <a:ext cx="3172968" cy="320040"/>
+          </a:xfrm>
+          <a:prstGeom prst="roundRect">
+            <a:avLst/>
+          </a:prstGeom>
+          <a:solidFill>
+            <a:srgbClr val="FFFFFF"/>
+          </a:solidFill>
+          <a:ln w="19050">
+            <a:solidFill>
+              <a:srgbClr val="14B8A6"/>
+            </a:solidFill>
+          </a:ln>
+        </p:spPr>
+        <p:style>
+          <a:lnRef idx="1">
+            <a:schemeClr val="accent1"/>
+          </a:lnRef>
+          <a:fillRef idx="3">
+            <a:schemeClr val="accent1"/>
+          </a:fillRef>
+          <a:effectRef idx="2">
+            <a:schemeClr val="accent1"/>
+          </a:effectRef>
+          <a:fontRef idx="minor">
+            <a:schemeClr val="lt1"/>
+          </a:fontRef>
+        </p:style>
+        <p:txBody>
+          <a:bodyPr rtlCol="0" anchor="ctr" lIns="0" tIns="0" rIns="0" bIns="0"/>
+          <a:lstStyle/>
+          <a:p>
+            <a:pPr algn="ctr">
+              <a:defRPr sz="950" b="1">
                 <a:solidFill>
                   <a:srgbClr val="0D9488"/>
                 </a:solidFill>
@@ -7704,12 +8124,171 @@
               <a:t>TECHNICAL RISK &amp; WORKAROUND</a:t>
             </a:r>
           </a:p>
+        </p:txBody>
+      </p:sp>
+      <p:sp>
+        <p:nvSpPr>
+          <p:cNvPr id="15" name="TextBox 14"/>
+          <p:cNvSpPr txBox="1"/>
+          <p:nvPr/>
+        </p:nvSpPr>
+        <p:spPr>
+          <a:xfrm>
+            <a:off x="960120" y="5513832"/>
+            <a:ext cx="4709160" cy="658368"/>
+          </a:xfrm>
+          <a:prstGeom prst="rect">
+            <a:avLst/>
+          </a:prstGeom>
+          <a:noFill/>
+        </p:spPr>
+        <p:txBody>
+          <a:bodyPr wrap="square" lIns="0" tIns="0" rIns="0" bIns="0">
+            <a:spAutoFit/>
+          </a:bodyPr>
+          <a:lstStyle/>
+          <a:p>
+            <a:pPr>
+              <a:defRPr sz="1150">
+                <a:solidFill>
+                  <a:srgbClr val="1E293B"/>
+                </a:solidFill>
+                <a:latin typeface="Arial"/>
+              </a:defRPr>
+            </a:pPr>
+            <a:r>
+              <a:t>Risk: origin hidden by VPN, Tor or mail providers. Workaround: trusted-boundary logic, flag anonymizers, lower confidence.</a:t>
+            </a:r>
+          </a:p>
+        </p:txBody>
+      </p:sp>
+      <p:sp>
+        <p:nvSpPr>
+          <p:cNvPr id="16" name="Rounded Rectangle 15"/>
+          <p:cNvSpPr/>
+          <p:nvPr/>
+        </p:nvSpPr>
+        <p:spPr>
+          <a:xfrm>
+            <a:off x="6291072" y="1874519"/>
+            <a:ext cx="5166360" cy="4389120"/>
+          </a:xfrm>
+          <a:prstGeom prst="roundRect">
+            <a:avLst/>
+          </a:prstGeom>
+          <a:solidFill>
+            <a:srgbClr val="FFFFFF"/>
+          </a:solidFill>
+          <a:ln w="19050">
+            <a:solidFill>
+              <a:srgbClr val="E2E8F0"/>
+            </a:solidFill>
+          </a:ln>
+        </p:spPr>
+        <p:style>
+          <a:lnRef idx="1">
+            <a:schemeClr val="accent1"/>
+          </a:lnRef>
+          <a:fillRef idx="3">
+            <a:schemeClr val="accent1"/>
+          </a:fillRef>
+          <a:effectRef idx="2">
+            <a:schemeClr val="accent1"/>
+          </a:effectRef>
+          <a:fontRef idx="minor">
+            <a:schemeClr val="lt1"/>
+          </a:fontRef>
+        </p:style>
+        <p:txBody>
+          <a:bodyPr rtlCol="0" anchor="ctr"/>
+          <a:lstStyle/>
+          <a:p>
+            <a:pPr algn="ctr"/>
+          </a:p>
+        </p:txBody>
+      </p:sp>
+      <p:sp>
+        <p:nvSpPr>
+          <p:cNvPr id="17" name="Rounded Rectangle 16"/>
+          <p:cNvSpPr/>
+          <p:nvPr/>
+        </p:nvSpPr>
+        <p:spPr>
+          <a:xfrm>
+            <a:off x="6519672" y="2084831"/>
+            <a:ext cx="1645920" cy="320040"/>
+          </a:xfrm>
+          <a:prstGeom prst="roundRect">
+            <a:avLst/>
+          </a:prstGeom>
+          <a:solidFill>
+            <a:srgbClr val="FFFFFF"/>
+          </a:solidFill>
+          <a:ln w="19050">
+            <a:solidFill>
+              <a:srgbClr val="14B8A6"/>
+            </a:solidFill>
+          </a:ln>
+        </p:spPr>
+        <p:style>
+          <a:lnRef idx="1">
+            <a:schemeClr val="accent1"/>
+          </a:lnRef>
+          <a:fillRef idx="3">
+            <a:schemeClr val="accent1"/>
+          </a:fillRef>
+          <a:effectRef idx="2">
+            <a:schemeClr val="accent1"/>
+          </a:effectRef>
+          <a:fontRef idx="minor">
+            <a:schemeClr val="lt1"/>
+          </a:fontRef>
+        </p:style>
+        <p:txBody>
+          <a:bodyPr rtlCol="0" anchor="ctr" lIns="0" tIns="0" rIns="0" bIns="0"/>
+          <a:lstStyle/>
+          <a:p>
+            <a:pPr algn="ctr">
+              <a:defRPr sz="950" b="1">
+                <a:solidFill>
+                  <a:srgbClr val="0D9488"/>
+                </a:solidFill>
+                <a:latin typeface="Arial"/>
+              </a:defRPr>
+            </a:pPr>
+            <a:r>
+              <a:t>ETHICS &amp; SAFETY</a:t>
+            </a:r>
+          </a:p>
+        </p:txBody>
+      </p:sp>
+      <p:sp>
+        <p:nvSpPr>
+          <p:cNvPr id="18" name="TextBox 17"/>
+          <p:cNvSpPr txBox="1"/>
+          <p:nvPr/>
+        </p:nvSpPr>
+        <p:spPr>
+          <a:xfrm>
+            <a:off x="6519672" y="2542032"/>
+            <a:ext cx="4709160" cy="3566160"/>
+          </a:xfrm>
+          <a:prstGeom prst="rect">
+            <a:avLst/>
+          </a:prstGeom>
+          <a:noFill/>
+        </p:spPr>
+        <p:txBody>
+          <a:bodyPr wrap="square" lIns="0" tIns="0" rIns="0" bIns="0">
+            <a:spAutoFit/>
+          </a:bodyPr>
+          <a:lstStyle/>
           <a:p>
             <a:pPr>
               <a:spcAft>
-                <a:spcPts val="300"/>
+                <a:spcPts val="1600"/>
               </a:spcAft>
-              <a:defRPr sz="1100">
+              <a:defRPr sz="1150" b="1">
                 <a:solidFill>
                   <a:srgbClr val="1E293B"/>
                 </a:solidFill>
@@ -7717,15 +8296,15 @@
               </a:defRPr>
             </a:pPr>
             <a:r>
-              <a:t>• Risk: Attack origins disguised behind VPNs, Tor, or commercial webmail relays.</a:t>
+              <a:t>Privacy: local processing, PII masking, retention limits.</a:t>
             </a:r>
           </a:p>
           <a:p>
             <a:pPr>
               <a:spcAft>
-                <a:spcPts val="300"/>
+                <a:spcPts val="1600"/>
               </a:spcAft>
-              <a:defRPr sz="1100">
+              <a:defRPr sz="1150" b="1">
                 <a:solidFill>
                   <a:srgbClr val="1E293B"/>
                 </a:solidFill>
@@ -7733,7 +8312,20 @@
               </a:defRPr>
             </a:pPr>
             <a:r>
-              <a:t>• Workaround: Proprietary trust-boundary hop subtraction, detecting intermediate relay injection points, and downgrading confidence on known anonymizers.</a:t>
+              <a:t>Bias: multilingual train and test data, per-language error checks.</a:t>
+            </a:r>
+          </a:p>
+          <a:p>
+            <a:pPr>
+              <a:defRPr sz="1150" b="1">
+                <a:solidFill>
+                  <a:srgbClr val="1E293B"/>
+                </a:solidFill>
+                <a:latin typeface="Arial"/>
+              </a:defRPr>
+            </a:pPr>
+            <a:r>
+              <a:t>Guardrails: LLM output tied to header evidence; confidence scores, not accusations; human review.</a:t>
             </a:r>
           </a:p>
         </p:txBody>
